--- a/HomeCredit_CreditRiskScoring.pptx
+++ b/HomeCredit_CreditRiskScoring.pptx
@@ -4,6 +4,9 @@
   <p:sldMasterIdLst>
     <p:sldMasterId id="2147483648" r:id="rId1"/>
   </p:sldMasterIdLst>
+  <p:notesMasterIdLst>
+    <p:notesMasterId r:id="rId12"/>
+  </p:notesMasterIdLst>
   <p:sldIdLst>
     <p:sldId id="256" r:id="rId2"/>
     <p:sldId id="257" r:id="rId3"/>
@@ -16,9 +19,6 @@
     <p:sldId id="264" r:id="rId10"/>
     <p:sldId id="265" r:id="rId11"/>
   </p:sldIdLst>
-  <p:notesMasterIdLst>
-    <p:notesMasterId r:id="rId12"/>
-  </p:notesMasterIdLst>
   <p:sldSz cx="12192000" cy="6858000"/>
   <p:notesSz cx="6858000" cy="12192000"/>
   <p:defaultTextStyle>
@@ -113,13 +113,20 @@
       </a:defRPr>
     </a:lvl9pPr>
   </p:defaultTextStyle>
+  <p:extLst>
+    <p:ext uri="{EFAFB233-063F-42B5-8137-9DF3F51BA10A}">
+      <p15:sldGuideLst xmlns:p15="http://schemas.microsoft.com/office/powerpoint/2012/main"/>
+    </p:ext>
+  </p:extLst>
 </p:presentation>
 </file>
 
 <file path=ppt/charts/chart1.xml><?xml version="1.0" encoding="utf-8"?>
-<c:chartSpace xmlns:c="http://schemas.openxmlformats.org/drawingml/2006/chart" xmlns:a="http://schemas.openxmlformats.org/drawingml/2006/main" xmlns:r="http://schemas.openxmlformats.org/officeDocument/2006/relationships">
+<c:chartSpace xmlns:c="http://schemas.openxmlformats.org/drawingml/2006/chart" xmlns:a="http://schemas.openxmlformats.org/drawingml/2006/main" xmlns:r="http://schemas.openxmlformats.org/officeDocument/2006/relationships" xmlns:c16r2="http://schemas.microsoft.com/office/drawing/2015/06/chart">
   <c:date1904 val="0"/>
+  <c:lang val="en-US"/>
   <c:roundedCorners val="1"/>
+  <c:style val="2"/>
   <c:chart>
     <c:title>
       <c:tx>
@@ -136,7 +143,7 @@
               </a:defRPr>
             </a:pPr>
             <a:r>
-              <a:rPr sz="1600" b="0" i="0" u="none" strike="noStrike">
+              <a:rPr lang="en-ID" sz="1600" b="0" i="0" u="none" strike="noStrike">
                 <a:solidFill>
                   <a:srgbClr val="2B3036"/>
                 </a:solidFill>
@@ -147,7 +154,6 @@
           </a:p>
         </c:rich>
       </c:tx>
-      <c:layout/>
       <c:overlay val="0"/>
     </c:title>
     <c:autoTitleDeleted val="0"/>
@@ -178,51 +184,25 @@
             <a:effectLst/>
           </c:spPr>
           <c:invertIfNegative val="0"/>
-          <c:dLbls>
-            <c:numFmt formatCode="0.0&quot;%&quot;" sourceLinked="0"/>
-            <c:txPr>
-              <a:bodyPr/>
-              <a:lstStyle/>
-              <a:p>
-                <a:pPr>
-                  <a:defRPr b="0" i="0" strike="noStrike" sz="1300" u="none">
-                    <a:solidFill>
-                      <a:srgbClr val="2B3036"/>
-                    </a:solidFill>
-                    <a:latin typeface="Calibri"/>
-                  </a:defRPr>
-                </a:pPr>
-              </a:p>
-            </c:txPr>
-            <c:showLegendKey val="0"/>
-            <c:showVal val="1"/>
-            <c:showCatName val="0"/>
-            <c:showSerName val="0"/>
-            <c:showPercent val="0"/>
-            <c:showBubbleSize val="0"/>
-            <c:showLeaderLines val="0"/>
-          </c:dLbls>
           <c:dPt>
             <c:idx val="0"/>
             <c:invertIfNegative val="0"/>
             <c:bubble3D val="0"/>
-            <c:spPr>
-              <a:solidFill>
-                <a:srgbClr val="C8102E"/>
-              </a:solidFill>
-              <a:effectLst/>
-            </c:spPr>
+            <c:extLst>
+              <c:ext xmlns:c16="http://schemas.microsoft.com/office/drawing/2014/chart" uri="{C3380CC4-5D6E-409C-BE32-E72D297353CC}">
+                <c16:uniqueId val="{00000001-997F-4F45-9F7B-22EE188A5FDA}"/>
+              </c:ext>
+            </c:extLst>
           </c:dPt>
           <c:dPt>
             <c:idx val="1"/>
             <c:invertIfNegative val="0"/>
             <c:bubble3D val="0"/>
-            <c:spPr>
-              <a:solidFill>
-                <a:srgbClr val="C8102E"/>
-              </a:solidFill>
-              <a:effectLst/>
-            </c:spPr>
+            <c:extLst>
+              <c:ext xmlns:c16="http://schemas.microsoft.com/office/drawing/2014/chart" uri="{C3380CC4-5D6E-409C-BE32-E72D297353CC}">
+                <c16:uniqueId val="{00000003-997F-4F45-9F7B-22EE188A5FDA}"/>
+              </c:ext>
+            </c:extLst>
           </c:dPt>
           <c:dPt>
             <c:idx val="2"/>
@@ -234,6 +214,11 @@
               </a:solidFill>
               <a:effectLst/>
             </c:spPr>
+            <c:extLst>
+              <c:ext xmlns:c16="http://schemas.microsoft.com/office/drawing/2014/chart" uri="{C3380CC4-5D6E-409C-BE32-E72D297353CC}">
+                <c16:uniqueId val="{00000005-997F-4F45-9F7B-22EE188A5FDA}"/>
+              </c:ext>
+            </c:extLst>
           </c:dPt>
           <c:dPt>
             <c:idx val="3"/>
@@ -245,6 +230,11 @@
               </a:solidFill>
               <a:effectLst/>
             </c:spPr>
+            <c:extLst>
+              <c:ext xmlns:c16="http://schemas.microsoft.com/office/drawing/2014/chart" uri="{C3380CC4-5D6E-409C-BE32-E72D297353CC}">
+                <c16:uniqueId val="{00000007-997F-4F45-9F7B-22EE188A5FDA}"/>
+              </c:ext>
+            </c:extLst>
           </c:dPt>
           <c:dPt>
             <c:idx val="4"/>
@@ -256,6 +246,11 @@
               </a:solidFill>
               <a:effectLst/>
             </c:spPr>
+            <c:extLst>
+              <c:ext xmlns:c16="http://schemas.microsoft.com/office/drawing/2014/chart" uri="{C3380CC4-5D6E-409C-BE32-E72D297353CC}">
+                <c16:uniqueId val="{00000009-997F-4F45-9F7B-22EE188A5FDA}"/>
+              </c:ext>
+            </c:extLst>
           </c:dPt>
           <c:dPt>
             <c:idx val="5"/>
@@ -267,6 +262,11 @@
               </a:solidFill>
               <a:effectLst/>
             </c:spPr>
+            <c:extLst>
+              <c:ext xmlns:c16="http://schemas.microsoft.com/office/drawing/2014/chart" uri="{C3380CC4-5D6E-409C-BE32-E72D297353CC}">
+                <c16:uniqueId val="{0000000B-997F-4F45-9F7B-22EE188A5FDA}"/>
+              </c:ext>
+            </c:extLst>
           </c:dPt>
           <c:dPt>
             <c:idx val="6"/>
@@ -278,6 +278,11 @@
               </a:solidFill>
               <a:effectLst/>
             </c:spPr>
+            <c:extLst>
+              <c:ext xmlns:c16="http://schemas.microsoft.com/office/drawing/2014/chart" uri="{C3380CC4-5D6E-409C-BE32-E72D297353CC}">
+                <c16:uniqueId val="{0000000D-997F-4F45-9F7B-22EE188A5FDA}"/>
+              </c:ext>
+            </c:extLst>
           </c:dPt>
           <c:dPt>
             <c:idx val="7"/>
@@ -289,6 +294,11 @@
               </a:solidFill>
               <a:effectLst/>
             </c:spPr>
+            <c:extLst>
+              <c:ext xmlns:c16="http://schemas.microsoft.com/office/drawing/2014/chart" uri="{C3380CC4-5D6E-409C-BE32-E72D297353CC}">
+                <c16:uniqueId val="{0000000F-997F-4F45-9F7B-22EE188A5FDA}"/>
+              </c:ext>
+            </c:extLst>
           </c:dPt>
           <c:dPt>
             <c:idx val="8"/>
@@ -300,6 +310,11 @@
               </a:solidFill>
               <a:effectLst/>
             </c:spPr>
+            <c:extLst>
+              <c:ext xmlns:c16="http://schemas.microsoft.com/office/drawing/2014/chart" uri="{C3380CC4-5D6E-409C-BE32-E72D297353CC}">
+                <c16:uniqueId val="{00000011-997F-4F45-9F7B-22EE188A5FDA}"/>
+              </c:ext>
+            </c:extLst>
           </c:dPt>
           <c:dPt>
             <c:idx val="9"/>
@@ -311,46 +326,86 @@
               </a:solidFill>
               <a:effectLst/>
             </c:spPr>
+            <c:extLst>
+              <c:ext xmlns:c16="http://schemas.microsoft.com/office/drawing/2014/chart" uri="{C3380CC4-5D6E-409C-BE32-E72D297353CC}">
+                <c16:uniqueId val="{00000013-997F-4F45-9F7B-22EE188A5FDA}"/>
+              </c:ext>
+            </c:extLst>
           </c:dPt>
+          <c:dLbls>
+            <c:numFmt formatCode="0.0&quot;%&quot;" sourceLinked="0"/>
+            <c:spPr>
+              <a:noFill/>
+              <a:ln>
+                <a:noFill/>
+              </a:ln>
+              <a:effectLst/>
+            </c:spPr>
+            <c:txPr>
+              <a:bodyPr/>
+              <a:lstStyle/>
+              <a:p>
+                <a:pPr>
+                  <a:defRPr sz="1300" b="0" i="0" u="none" strike="noStrike">
+                    <a:solidFill>
+                      <a:srgbClr val="2B3036"/>
+                    </a:solidFill>
+                    <a:latin typeface="Calibri"/>
+                  </a:defRPr>
+                </a:pPr>
+                <a:endParaRPr lang="en-US"/>
+              </a:p>
+            </c:txPr>
+            <c:showLegendKey val="0"/>
+            <c:showVal val="1"/>
+            <c:showCatName val="0"/>
+            <c:showSerName val="0"/>
+            <c:showPercent val="0"/>
+            <c:showBubbleSize val="0"/>
+            <c:showLeaderLines val="0"/>
+            <c:extLst>
+              <c:ext xmlns:c15="http://schemas.microsoft.com/office/drawing/2012/chart" uri="{CE6537A1-D6FC-4f65-9D91-7224C49458BB}">
+                <c15:showLeaderLines val="0"/>
+              </c:ext>
+            </c:extLst>
+          </c:dLbls>
           <c:cat>
-            <c:multiLvlStrRef>
+            <c:strRef>
               <c:f>Sheet1!$A$2:$A$11</c:f>
-              <c:multiLvlStrCache>
+              <c:strCache>
                 <c:ptCount val="10"/>
-                <c:lvl>
-                  <c:pt idx="0">
-                    <c:v>D1</c:v>
-                  </c:pt>
-                  <c:pt idx="1">
-                    <c:v>D2</c:v>
-                  </c:pt>
-                  <c:pt idx="2">
-                    <c:v>D3</c:v>
-                  </c:pt>
-                  <c:pt idx="3">
-                    <c:v>D4</c:v>
-                  </c:pt>
-                  <c:pt idx="4">
-                    <c:v>D5</c:v>
-                  </c:pt>
-                  <c:pt idx="5">
-                    <c:v>D6</c:v>
-                  </c:pt>
-                  <c:pt idx="6">
-                    <c:v>D7</c:v>
-                  </c:pt>
-                  <c:pt idx="7">
-                    <c:v>D8</c:v>
-                  </c:pt>
-                  <c:pt idx="8">
-                    <c:v>D9</c:v>
-                  </c:pt>
-                  <c:pt idx="9">
-                    <c:v>D10</c:v>
-                  </c:pt>
-                </c:lvl>
-              </c:multiLvlStrCache>
-            </c:multiLvlStrRef>
+                <c:pt idx="0">
+                  <c:v>D1</c:v>
+                </c:pt>
+                <c:pt idx="1">
+                  <c:v>D2</c:v>
+                </c:pt>
+                <c:pt idx="2">
+                  <c:v>D3</c:v>
+                </c:pt>
+                <c:pt idx="3">
+                  <c:v>D4</c:v>
+                </c:pt>
+                <c:pt idx="4">
+                  <c:v>D5</c:v>
+                </c:pt>
+                <c:pt idx="5">
+                  <c:v>D6</c:v>
+                </c:pt>
+                <c:pt idx="6">
+                  <c:v>D7</c:v>
+                </c:pt>
+                <c:pt idx="7">
+                  <c:v>D8</c:v>
+                </c:pt>
+                <c:pt idx="8">
+                  <c:v>D9</c:v>
+                </c:pt>
+                <c:pt idx="9">
+                  <c:v>D10</c:v>
+                </c:pt>
+              </c:strCache>
+            </c:strRef>
           </c:cat>
           <c:val>
             <c:numRef>
@@ -391,36 +446,23 @@
               </c:numCache>
             </c:numRef>
           </c:val>
+          <c:extLst>
+            <c:ext xmlns:c16="http://schemas.microsoft.com/office/drawing/2014/chart" uri="{C3380CC4-5D6E-409C-BE32-E72D297353CC}">
+              <c16:uniqueId val="{00000014-997F-4F45-9F7B-22EE188A5FDA}"/>
+            </c:ext>
+          </c:extLst>
         </c:ser>
         <c:dLbls>
-          <c:numFmt formatCode="0.0&quot;%&quot;" sourceLinked="0"/>
-          <c:txPr>
-            <a:bodyPr/>
-            <a:lstStyle/>
-            <a:p>
-              <a:pPr>
-                <a:defRPr b="0" i="0" strike="noStrike" sz="1300" u="none">
-                  <a:solidFill>
-                    <a:srgbClr val="2B3036"/>
-                  </a:solidFill>
-                  <a:latin typeface="Calibri"/>
-                </a:defRPr>
-              </a:pPr>
-            </a:p>
-          </c:txPr>
           <c:showLegendKey val="0"/>
           <c:showVal val="1"/>
           <c:showCatName val="0"/>
           <c:showSerName val="0"/>
           <c:showPercent val="0"/>
           <c:showBubbleSize val="0"/>
-          <c:showLeaderLines val="0"/>
         </c:dLbls>
         <c:gapWidth val="40"/>
-        <c:overlap val="0"/>
         <c:axId val="2094734554"/>
         <c:axId val="2094734552"/>
-        <c:axId val="2094734556"/>
       </c:barChart>
       <c:catAx>
         <c:axId val="2094734554"/>
@@ -461,6 +503,7 @@
         <c:crosses val="autoZero"/>
         <c:auto val="1"/>
         <c:lblAlgn val="ctr"/>
+        <c:lblOffset val="100"/>
         <c:noMultiLvlLbl val="1"/>
       </c:catAx>
       <c:valAx>
@@ -474,30 +517,6 @@
         <c:majorTickMark val="out"/>
         <c:minorTickMark val="none"/>
         <c:tickLblPos val="nextTo"/>
-        <c:spPr>
-          <a:ln w="12700" cap="flat">
-            <a:solidFill>
-              <a:srgbClr val="888888"/>
-            </a:solidFill>
-            <a:prstDash val="solid"/>
-            <a:round/>
-          </a:ln>
-        </c:spPr>
-        <c:txPr>
-          <a:bodyPr/>
-          <a:lstStyle/>
-          <a:p>
-            <a:pPr>
-              <a:defRPr sz="1200" b="0" i="0" u="none" strike="noStrike">
-                <a:solidFill>
-                  <a:srgbClr val="6B7280"/>
-                </a:solidFill>
-                <a:latin typeface="Calibri"/>
-              </a:defRPr>
-            </a:pPr>
-            <a:endParaRPr lang="en-US"/>
-          </a:p>
-        </c:txPr>
         <c:crossAx val="2094734554"/>
         <c:crosses val="autoZero"/>
         <c:crossBetween val="between"/>
@@ -512,6 +531,7 @@
     </c:plotArea>
     <c:plotVisOnly val="1"/>
     <c:dispBlanksAs val="span"/>
+    <c:showDLblsOverMax val="1"/>
   </c:chart>
   <c:spPr>
     <a:noFill/>
@@ -527,9 +547,11 @@
 </file>
 
 <file path=ppt/charts/chart2.xml><?xml version="1.0" encoding="utf-8"?>
-<c:chartSpace xmlns:c="http://schemas.openxmlformats.org/drawingml/2006/chart" xmlns:a="http://schemas.openxmlformats.org/drawingml/2006/main" xmlns:r="http://schemas.openxmlformats.org/officeDocument/2006/relationships">
+<c:chartSpace xmlns:c="http://schemas.openxmlformats.org/drawingml/2006/chart" xmlns:a="http://schemas.openxmlformats.org/drawingml/2006/main" xmlns:r="http://schemas.openxmlformats.org/officeDocument/2006/relationships" xmlns:c16r2="http://schemas.microsoft.com/office/drawing/2015/06/chart">
   <c:date1904 val="0"/>
+  <c:lang val="en-US"/>
   <c:roundedCorners val="1"/>
+  <c:style val="2"/>
   <c:chart>
     <c:title>
       <c:tx>
@@ -546,7 +568,7 @@
               </a:defRPr>
             </a:pPr>
             <a:r>
-              <a:rPr sz="1600" b="0" i="0" u="none" strike="noStrike">
+              <a:rPr lang="en-ID" sz="1600" b="0" i="0" u="none" strike="noStrike">
                 <a:solidFill>
                   <a:srgbClr val="2B3036"/>
                 </a:solidFill>
@@ -557,7 +579,6 @@
           </a:p>
         </c:rich>
       </c:tx>
-      <c:layout/>
       <c:overlay val="0"/>
     </c:title>
     <c:autoTitleDeleted val="0"/>
@@ -588,62 +609,35 @@
             <a:effectLst/>
           </c:spPr>
           <c:invertIfNegative val="0"/>
-          <c:dLbls>
-            <c:numFmt formatCode="0.0&quot;%&quot;" sourceLinked="0"/>
-            <c:txPr>
-              <a:bodyPr/>
-              <a:lstStyle/>
-              <a:p>
-                <a:pPr>
-                  <a:defRPr b="0" i="0" strike="noStrike" sz="1300" u="none">
-                    <a:solidFill>
-                      <a:srgbClr val="2B3036"/>
-                    </a:solidFill>
-                    <a:latin typeface="Calibri"/>
-                  </a:defRPr>
-                </a:pPr>
-              </a:p>
-            </c:txPr>
-            <c:showLegendKey val="0"/>
-            <c:showVal val="1"/>
-            <c:showCatName val="0"/>
-            <c:showSerName val="0"/>
-            <c:showPercent val="0"/>
-            <c:showBubbleSize val="0"/>
-            <c:showLeaderLines val="0"/>
-          </c:dLbls>
           <c:dPt>
             <c:idx val="0"/>
             <c:invertIfNegative val="0"/>
             <c:bubble3D val="0"/>
-            <c:spPr>
-              <a:solidFill>
-                <a:srgbClr val="C9CED6"/>
-              </a:solidFill>
-              <a:effectLst/>
-            </c:spPr>
+            <c:extLst>
+              <c:ext xmlns:c16="http://schemas.microsoft.com/office/drawing/2014/chart" uri="{C3380CC4-5D6E-409C-BE32-E72D297353CC}">
+                <c16:uniqueId val="{00000001-8268-4DFA-BFD9-6660D1F973A4}"/>
+              </c:ext>
+            </c:extLst>
           </c:dPt>
           <c:dPt>
             <c:idx val="1"/>
             <c:invertIfNegative val="0"/>
             <c:bubble3D val="0"/>
-            <c:spPr>
-              <a:solidFill>
-                <a:srgbClr val="C9CED6"/>
-              </a:solidFill>
-              <a:effectLst/>
-            </c:spPr>
+            <c:extLst>
+              <c:ext xmlns:c16="http://schemas.microsoft.com/office/drawing/2014/chart" uri="{C3380CC4-5D6E-409C-BE32-E72D297353CC}">
+                <c16:uniqueId val="{00000003-8268-4DFA-BFD9-6660D1F973A4}"/>
+              </c:ext>
+            </c:extLst>
           </c:dPt>
           <c:dPt>
             <c:idx val="2"/>
             <c:invertIfNegative val="0"/>
             <c:bubble3D val="0"/>
-            <c:spPr>
-              <a:solidFill>
-                <a:srgbClr val="C9CED6"/>
-              </a:solidFill>
-              <a:effectLst/>
-            </c:spPr>
+            <c:extLst>
+              <c:ext xmlns:c16="http://schemas.microsoft.com/office/drawing/2014/chart" uri="{C3380CC4-5D6E-409C-BE32-E72D297353CC}">
+                <c16:uniqueId val="{00000005-8268-4DFA-BFD9-6660D1F973A4}"/>
+              </c:ext>
+            </c:extLst>
           </c:dPt>
           <c:dPt>
             <c:idx val="3"/>
@@ -655,6 +649,11 @@
               </a:solidFill>
               <a:effectLst/>
             </c:spPr>
+            <c:extLst>
+              <c:ext xmlns:c16="http://schemas.microsoft.com/office/drawing/2014/chart" uri="{C3380CC4-5D6E-409C-BE32-E72D297353CC}">
+                <c16:uniqueId val="{00000007-8268-4DFA-BFD9-6660D1F973A4}"/>
+              </c:ext>
+            </c:extLst>
           </c:dPt>
           <c:dPt>
             <c:idx val="4"/>
@@ -666,31 +665,71 @@
               </a:solidFill>
               <a:effectLst/>
             </c:spPr>
+            <c:extLst>
+              <c:ext xmlns:c16="http://schemas.microsoft.com/office/drawing/2014/chart" uri="{C3380CC4-5D6E-409C-BE32-E72D297353CC}">
+                <c16:uniqueId val="{00000009-8268-4DFA-BFD9-6660D1F973A4}"/>
+              </c:ext>
+            </c:extLst>
           </c:dPt>
+          <c:dLbls>
+            <c:numFmt formatCode="0.0&quot;%&quot;" sourceLinked="0"/>
+            <c:spPr>
+              <a:noFill/>
+              <a:ln>
+                <a:noFill/>
+              </a:ln>
+              <a:effectLst/>
+            </c:spPr>
+            <c:txPr>
+              <a:bodyPr/>
+              <a:lstStyle/>
+              <a:p>
+                <a:pPr>
+                  <a:defRPr sz="1300" b="0" i="0" u="none" strike="noStrike">
+                    <a:solidFill>
+                      <a:srgbClr val="2B3036"/>
+                    </a:solidFill>
+                    <a:latin typeface="Calibri"/>
+                  </a:defRPr>
+                </a:pPr>
+                <a:endParaRPr lang="en-US"/>
+              </a:p>
+            </c:txPr>
+            <c:showLegendKey val="0"/>
+            <c:showVal val="1"/>
+            <c:showCatName val="0"/>
+            <c:showSerName val="0"/>
+            <c:showPercent val="0"/>
+            <c:showBubbleSize val="0"/>
+            <c:showLeaderLines val="0"/>
+            <c:extLst>
+              <c:ext xmlns:c15="http://schemas.microsoft.com/office/drawing/2012/chart" uri="{CE6537A1-D6FC-4f65-9D91-7224C49458BB}">
+                <c15:showLeaderLines val="0"/>
+              </c:ext>
+            </c:extLst>
+          </c:dLbls>
           <c:cat>
-            <c:multiLvlStrRef>
+            <c:strRef>
               <c:f>Sheet1!$A$2:$A$6</c:f>
-              <c:multiLvlStrCache>
+              <c:strCache>
                 <c:ptCount val="5"/>
-                <c:lvl>
-                  <c:pt idx="0">
-                    <c:v>0%</c:v>
-                  </c:pt>
-                  <c:pt idx="1">
-                    <c:v>1-30%</c:v>
-                  </c:pt>
-                  <c:pt idx="2">
-                    <c:v>30-60%</c:v>
-                  </c:pt>
-                  <c:pt idx="3">
-                    <c:v>60-90%</c:v>
-                  </c:pt>
-                  <c:pt idx="4">
-                    <c:v>&gt; 90%</c:v>
-                  </c:pt>
-                </c:lvl>
-              </c:multiLvlStrCache>
-            </c:multiLvlStrRef>
+                <c:pt idx="0">
+                  <c:v>0%</c:v>
+                </c:pt>
+                <c:pt idx="1">
+                  <c:v>1-30%</c:v>
+                </c:pt>
+                <c:pt idx="2">
+                  <c:v>30-60%</c:v>
+                </c:pt>
+                <c:pt idx="3">
+                  <c:v>60-90%</c:v>
+                </c:pt>
+                <c:pt idx="4">
+                  <c:v>&gt; 90%</c:v>
+                </c:pt>
+              </c:strCache>
+            </c:strRef>
           </c:cat>
           <c:val>
             <c:numRef>
@@ -716,36 +755,23 @@
               </c:numCache>
             </c:numRef>
           </c:val>
+          <c:extLst>
+            <c:ext xmlns:c16="http://schemas.microsoft.com/office/drawing/2014/chart" uri="{C3380CC4-5D6E-409C-BE32-E72D297353CC}">
+              <c16:uniqueId val="{0000000A-8268-4DFA-BFD9-6660D1F973A4}"/>
+            </c:ext>
+          </c:extLst>
         </c:ser>
         <c:dLbls>
-          <c:numFmt formatCode="0.0&quot;%&quot;" sourceLinked="0"/>
-          <c:txPr>
-            <a:bodyPr/>
-            <a:lstStyle/>
-            <a:p>
-              <a:pPr>
-                <a:defRPr b="0" i="0" strike="noStrike" sz="1300" u="none">
-                  <a:solidFill>
-                    <a:srgbClr val="2B3036"/>
-                  </a:solidFill>
-                  <a:latin typeface="Calibri"/>
-                </a:defRPr>
-              </a:pPr>
-            </a:p>
-          </c:txPr>
           <c:showLegendKey val="0"/>
           <c:showVal val="1"/>
           <c:showCatName val="0"/>
           <c:showSerName val="0"/>
           <c:showPercent val="0"/>
           <c:showBubbleSize val="0"/>
-          <c:showLeaderLines val="0"/>
         </c:dLbls>
         <c:gapWidth val="40"/>
-        <c:overlap val="0"/>
         <c:axId val="2094734554"/>
         <c:axId val="2094734552"/>
-        <c:axId val="2094734556"/>
       </c:barChart>
       <c:catAx>
         <c:axId val="2094734554"/>
@@ -786,6 +812,7 @@
         <c:crosses val="autoZero"/>
         <c:auto val="1"/>
         <c:lblAlgn val="ctr"/>
+        <c:lblOffset val="100"/>
         <c:noMultiLvlLbl val="1"/>
       </c:catAx>
       <c:valAx>
@@ -799,30 +826,6 @@
         <c:majorTickMark val="out"/>
         <c:minorTickMark val="none"/>
         <c:tickLblPos val="nextTo"/>
-        <c:spPr>
-          <a:ln w="12700" cap="flat">
-            <a:solidFill>
-              <a:srgbClr val="888888"/>
-            </a:solidFill>
-            <a:prstDash val="solid"/>
-            <a:round/>
-          </a:ln>
-        </c:spPr>
-        <c:txPr>
-          <a:bodyPr/>
-          <a:lstStyle/>
-          <a:p>
-            <a:pPr>
-              <a:defRPr sz="1200" b="0" i="0" u="none" strike="noStrike">
-                <a:solidFill>
-                  <a:srgbClr val="6B7280"/>
-                </a:solidFill>
-                <a:latin typeface="Calibri"/>
-              </a:defRPr>
-            </a:pPr>
-            <a:endParaRPr lang="en-US"/>
-          </a:p>
-        </c:txPr>
         <c:crossAx val="2094734554"/>
         <c:crosses val="autoZero"/>
         <c:crossBetween val="between"/>
@@ -837,6 +840,7 @@
     </c:plotArea>
     <c:plotVisOnly val="1"/>
     <c:dispBlanksAs val="span"/>
+    <c:showDLblsOverMax val="1"/>
   </c:chart>
   <c:spPr>
     <a:noFill/>
@@ -852,9 +856,11 @@
 </file>
 
 <file path=ppt/charts/chart3.xml><?xml version="1.0" encoding="utf-8"?>
-<c:chartSpace xmlns:c="http://schemas.openxmlformats.org/drawingml/2006/chart" xmlns:a="http://schemas.openxmlformats.org/drawingml/2006/main" xmlns:r="http://schemas.openxmlformats.org/officeDocument/2006/relationships">
+<c:chartSpace xmlns:c="http://schemas.openxmlformats.org/drawingml/2006/chart" xmlns:a="http://schemas.openxmlformats.org/drawingml/2006/main" xmlns:r="http://schemas.openxmlformats.org/officeDocument/2006/relationships" xmlns:c16r2="http://schemas.microsoft.com/office/drawing/2015/06/chart">
   <c:date1904 val="0"/>
+  <c:lang val="en-US"/>
   <c:roundedCorners val="1"/>
+  <c:style val="2"/>
   <c:chart>
     <c:title>
       <c:tx>
@@ -871,7 +877,7 @@
               </a:defRPr>
             </a:pPr>
             <a:r>
-              <a:rPr sz="1600" b="0" i="0" u="none" strike="noStrike">
+              <a:rPr lang="en-ID" sz="1600" b="0" i="0" u="none" strike="noStrike">
                 <a:solidFill>
                   <a:srgbClr val="2B3036"/>
                 </a:solidFill>
@@ -882,7 +888,6 @@
           </a:p>
         </c:rich>
       </c:tx>
-      <c:layout/>
       <c:overlay val="0"/>
     </c:title>
     <c:autoTitleDeleted val="0"/>
@@ -913,84 +918,55 @@
             <a:effectLst/>
           </c:spPr>
           <c:invertIfNegative val="0"/>
-          <c:dLbls>
-            <c:numFmt formatCode="0.0&quot;%&quot;" sourceLinked="0"/>
-            <c:txPr>
-              <a:bodyPr/>
-              <a:lstStyle/>
-              <a:p>
-                <a:pPr>
-                  <a:defRPr b="0" i="0" strike="noStrike" sz="1300" u="none">
-                    <a:solidFill>
-                      <a:srgbClr val="2B3036"/>
-                    </a:solidFill>
-                    <a:latin typeface="Calibri"/>
-                  </a:defRPr>
-                </a:pPr>
-              </a:p>
-            </c:txPr>
-            <c:showLegendKey val="0"/>
-            <c:showVal val="1"/>
-            <c:showCatName val="0"/>
-            <c:showSerName val="0"/>
-            <c:showPercent val="0"/>
-            <c:showBubbleSize val="0"/>
-            <c:showLeaderLines val="0"/>
-          </c:dLbls>
           <c:dPt>
             <c:idx val="0"/>
             <c:invertIfNegative val="0"/>
             <c:bubble3D val="0"/>
-            <c:spPr>
-              <a:solidFill>
-                <a:srgbClr val="C9CED6"/>
-              </a:solidFill>
-              <a:effectLst/>
-            </c:spPr>
+            <c:extLst>
+              <c:ext xmlns:c16="http://schemas.microsoft.com/office/drawing/2014/chart" uri="{C3380CC4-5D6E-409C-BE32-E72D297353CC}">
+                <c16:uniqueId val="{00000001-0DE5-4A6B-A9B8-951DA1373787}"/>
+              </c:ext>
+            </c:extLst>
           </c:dPt>
           <c:dPt>
             <c:idx val="1"/>
             <c:invertIfNegative val="0"/>
             <c:bubble3D val="0"/>
-            <c:spPr>
-              <a:solidFill>
-                <a:srgbClr val="C9CED6"/>
-              </a:solidFill>
-              <a:effectLst/>
-            </c:spPr>
+            <c:extLst>
+              <c:ext xmlns:c16="http://schemas.microsoft.com/office/drawing/2014/chart" uri="{C3380CC4-5D6E-409C-BE32-E72D297353CC}">
+                <c16:uniqueId val="{00000003-0DE5-4A6B-A9B8-951DA1373787}"/>
+              </c:ext>
+            </c:extLst>
           </c:dPt>
           <c:dPt>
             <c:idx val="2"/>
             <c:invertIfNegative val="0"/>
             <c:bubble3D val="0"/>
-            <c:spPr>
-              <a:solidFill>
-                <a:srgbClr val="C9CED6"/>
-              </a:solidFill>
-              <a:effectLst/>
-            </c:spPr>
+            <c:extLst>
+              <c:ext xmlns:c16="http://schemas.microsoft.com/office/drawing/2014/chart" uri="{C3380CC4-5D6E-409C-BE32-E72D297353CC}">
+                <c16:uniqueId val="{00000005-0DE5-4A6B-A9B8-951DA1373787}"/>
+              </c:ext>
+            </c:extLst>
           </c:dPt>
           <c:dPt>
             <c:idx val="3"/>
             <c:invertIfNegative val="0"/>
             <c:bubble3D val="0"/>
-            <c:spPr>
-              <a:solidFill>
-                <a:srgbClr val="C9CED6"/>
-              </a:solidFill>
-              <a:effectLst/>
-            </c:spPr>
+            <c:extLst>
+              <c:ext xmlns:c16="http://schemas.microsoft.com/office/drawing/2014/chart" uri="{C3380CC4-5D6E-409C-BE32-E72D297353CC}">
+                <c16:uniqueId val="{00000007-0DE5-4A6B-A9B8-951DA1373787}"/>
+              </c:ext>
+            </c:extLst>
           </c:dPt>
           <c:dPt>
             <c:idx val="4"/>
             <c:invertIfNegative val="0"/>
             <c:bubble3D val="0"/>
-            <c:spPr>
-              <a:solidFill>
-                <a:srgbClr val="C9CED6"/>
-              </a:solidFill>
-              <a:effectLst/>
-            </c:spPr>
+            <c:extLst>
+              <c:ext xmlns:c16="http://schemas.microsoft.com/office/drawing/2014/chart" uri="{C3380CC4-5D6E-409C-BE32-E72D297353CC}">
+                <c16:uniqueId val="{00000009-0DE5-4A6B-A9B8-951DA1373787}"/>
+              </c:ext>
+            </c:extLst>
           </c:dPt>
           <c:dPt>
             <c:idx val="5"/>
@@ -1002,6 +978,11 @@
               </a:solidFill>
               <a:effectLst/>
             </c:spPr>
+            <c:extLst>
+              <c:ext xmlns:c16="http://schemas.microsoft.com/office/drawing/2014/chart" uri="{C3380CC4-5D6E-409C-BE32-E72D297353CC}">
+                <c16:uniqueId val="{0000000B-0DE5-4A6B-A9B8-951DA1373787}"/>
+              </c:ext>
+            </c:extLst>
           </c:dPt>
           <c:dPt>
             <c:idx val="6"/>
@@ -1013,37 +994,77 @@
               </a:solidFill>
               <a:effectLst/>
             </c:spPr>
+            <c:extLst>
+              <c:ext xmlns:c16="http://schemas.microsoft.com/office/drawing/2014/chart" uri="{C3380CC4-5D6E-409C-BE32-E72D297353CC}">
+                <c16:uniqueId val="{0000000D-0DE5-4A6B-A9B8-951DA1373787}"/>
+              </c:ext>
+            </c:extLst>
           </c:dPt>
+          <c:dLbls>
+            <c:numFmt formatCode="0.0&quot;%&quot;" sourceLinked="0"/>
+            <c:spPr>
+              <a:noFill/>
+              <a:ln>
+                <a:noFill/>
+              </a:ln>
+              <a:effectLst/>
+            </c:spPr>
+            <c:txPr>
+              <a:bodyPr/>
+              <a:lstStyle/>
+              <a:p>
+                <a:pPr>
+                  <a:defRPr sz="1300" b="0" i="0" u="none" strike="noStrike">
+                    <a:solidFill>
+                      <a:srgbClr val="2B3036"/>
+                    </a:solidFill>
+                    <a:latin typeface="Calibri"/>
+                  </a:defRPr>
+                </a:pPr>
+                <a:endParaRPr lang="en-US"/>
+              </a:p>
+            </c:txPr>
+            <c:showLegendKey val="0"/>
+            <c:showVal val="1"/>
+            <c:showCatName val="0"/>
+            <c:showSerName val="0"/>
+            <c:showPercent val="0"/>
+            <c:showBubbleSize val="0"/>
+            <c:showLeaderLines val="0"/>
+            <c:extLst>
+              <c:ext xmlns:c15="http://schemas.microsoft.com/office/drawing/2012/chart" uri="{CE6537A1-D6FC-4f65-9D91-7224C49458BB}">
+                <c15:showLeaderLines val="0"/>
+              </c:ext>
+            </c:extLst>
+          </c:dLbls>
           <c:cat>
-            <c:multiLvlStrRef>
+            <c:strRef>
               <c:f>Sheet1!$A$2:$A$8</c:f>
-              <c:multiLvlStrCache>
+              <c:strCache>
                 <c:ptCount val="7"/>
-                <c:lvl>
-                  <c:pt idx="0">
-                    <c:v>0</c:v>
-                  </c:pt>
-                  <c:pt idx="1">
-                    <c:v>1</c:v>
-                  </c:pt>
-                  <c:pt idx="2">
-                    <c:v>2</c:v>
-                  </c:pt>
-                  <c:pt idx="3">
-                    <c:v>3</c:v>
-                  </c:pt>
-                  <c:pt idx="4">
-                    <c:v>4</c:v>
-                  </c:pt>
-                  <c:pt idx="5">
-                    <c:v>5</c:v>
-                  </c:pt>
-                  <c:pt idx="6">
-                    <c:v>6+</c:v>
-                  </c:pt>
-                </c:lvl>
-              </c:multiLvlStrCache>
-            </c:multiLvlStrRef>
+                <c:pt idx="0">
+                  <c:v>0</c:v>
+                </c:pt>
+                <c:pt idx="1">
+                  <c:v>1</c:v>
+                </c:pt>
+                <c:pt idx="2">
+                  <c:v>2</c:v>
+                </c:pt>
+                <c:pt idx="3">
+                  <c:v>3</c:v>
+                </c:pt>
+                <c:pt idx="4">
+                  <c:v>4</c:v>
+                </c:pt>
+                <c:pt idx="5">
+                  <c:v>5</c:v>
+                </c:pt>
+                <c:pt idx="6">
+                  <c:v>6+</c:v>
+                </c:pt>
+              </c:strCache>
+            </c:strRef>
           </c:cat>
           <c:val>
             <c:numRef>
@@ -1061,10 +1082,10 @@
                   <c:v>7.4</c:v>
                 </c:pt>
                 <c:pt idx="3">
-                  <c:v>8.3</c:v>
+                  <c:v>8.3000000000000007</c:v>
                 </c:pt>
                 <c:pt idx="4">
-                  <c:v>9.2</c:v>
+                  <c:v>9.1999999999999993</c:v>
                 </c:pt>
                 <c:pt idx="5">
                   <c:v>10.7</c:v>
@@ -1075,36 +1096,23 @@
               </c:numCache>
             </c:numRef>
           </c:val>
+          <c:extLst>
+            <c:ext xmlns:c16="http://schemas.microsoft.com/office/drawing/2014/chart" uri="{C3380CC4-5D6E-409C-BE32-E72D297353CC}">
+              <c16:uniqueId val="{0000000E-0DE5-4A6B-A9B8-951DA1373787}"/>
+            </c:ext>
+          </c:extLst>
         </c:ser>
         <c:dLbls>
-          <c:numFmt formatCode="0.0&quot;%&quot;" sourceLinked="0"/>
-          <c:txPr>
-            <a:bodyPr/>
-            <a:lstStyle/>
-            <a:p>
-              <a:pPr>
-                <a:defRPr b="0" i="0" strike="noStrike" sz="1300" u="none">
-                  <a:solidFill>
-                    <a:srgbClr val="2B3036"/>
-                  </a:solidFill>
-                  <a:latin typeface="Calibri"/>
-                </a:defRPr>
-              </a:pPr>
-            </a:p>
-          </c:txPr>
           <c:showLegendKey val="0"/>
           <c:showVal val="1"/>
           <c:showCatName val="0"/>
           <c:showSerName val="0"/>
           <c:showPercent val="0"/>
           <c:showBubbleSize val="0"/>
-          <c:showLeaderLines val="0"/>
         </c:dLbls>
         <c:gapWidth val="40"/>
-        <c:overlap val="0"/>
         <c:axId val="2094734554"/>
         <c:axId val="2094734552"/>
-        <c:axId val="2094734556"/>
       </c:barChart>
       <c:catAx>
         <c:axId val="2094734554"/>
@@ -1145,6 +1153,7 @@
         <c:crosses val="autoZero"/>
         <c:auto val="1"/>
         <c:lblAlgn val="ctr"/>
+        <c:lblOffset val="100"/>
         <c:noMultiLvlLbl val="1"/>
       </c:catAx>
       <c:valAx>
@@ -1158,30 +1167,6 @@
         <c:majorTickMark val="out"/>
         <c:minorTickMark val="none"/>
         <c:tickLblPos val="nextTo"/>
-        <c:spPr>
-          <a:ln w="12700" cap="flat">
-            <a:solidFill>
-              <a:srgbClr val="888888"/>
-            </a:solidFill>
-            <a:prstDash val="solid"/>
-            <a:round/>
-          </a:ln>
-        </c:spPr>
-        <c:txPr>
-          <a:bodyPr/>
-          <a:lstStyle/>
-          <a:p>
-            <a:pPr>
-              <a:defRPr sz="1200" b="0" i="0" u="none" strike="noStrike">
-                <a:solidFill>
-                  <a:srgbClr val="6B7280"/>
-                </a:solidFill>
-                <a:latin typeface="Calibri"/>
-              </a:defRPr>
-            </a:pPr>
-            <a:endParaRPr lang="en-US"/>
-          </a:p>
-        </c:txPr>
         <c:crossAx val="2094734554"/>
         <c:crosses val="autoZero"/>
         <c:crossBetween val="between"/>
@@ -1196,6 +1181,7 @@
     </c:plotArea>
     <c:plotVisOnly val="1"/>
     <c:dispBlanksAs val="span"/>
+    <c:showDLblsOverMax val="1"/>
   </c:chart>
   <c:spPr>
     <a:noFill/>
@@ -1211,9 +1197,11 @@
 </file>
 
 <file path=ppt/charts/chart4.xml><?xml version="1.0" encoding="utf-8"?>
-<c:chartSpace xmlns:c="http://schemas.openxmlformats.org/drawingml/2006/chart" xmlns:a="http://schemas.openxmlformats.org/drawingml/2006/main" xmlns:r="http://schemas.openxmlformats.org/officeDocument/2006/relationships">
+<c:chartSpace xmlns:c="http://schemas.openxmlformats.org/drawingml/2006/chart" xmlns:a="http://schemas.openxmlformats.org/drawingml/2006/main" xmlns:r="http://schemas.openxmlformats.org/officeDocument/2006/relationships" xmlns:c16r2="http://schemas.microsoft.com/office/drawing/2015/06/chart">
   <c:date1904 val="0"/>
+  <c:lang val="en-US"/>
   <c:roundedCorners val="1"/>
+  <c:style val="2"/>
   <c:chart>
     <c:title>
       <c:tx>
@@ -1230,7 +1218,7 @@
               </a:defRPr>
             </a:pPr>
             <a:r>
-              <a:rPr sz="1600" b="0" i="0" u="none" strike="noStrike">
+              <a:rPr lang="en-ID" sz="1600" b="0" i="0" u="none" strike="noStrike">
                 <a:solidFill>
                   <a:srgbClr val="2B3036"/>
                 </a:solidFill>
@@ -1241,7 +1229,6 @@
           </a:p>
         </c:rich>
       </c:tx>
-      <c:layout/>
       <c:overlay val="0"/>
     </c:title>
     <c:autoTitleDeleted val="0"/>
@@ -1272,62 +1259,35 @@
             <a:effectLst/>
           </c:spPr>
           <c:invertIfNegative val="0"/>
-          <c:dLbls>
-            <c:numFmt formatCode="0.000" sourceLinked="0"/>
-            <c:txPr>
-              <a:bodyPr/>
-              <a:lstStyle/>
-              <a:p>
-                <a:pPr>
-                  <a:defRPr b="0" i="0" strike="noStrike" sz="1300" u="none">
-                    <a:solidFill>
-                      <a:srgbClr val="2B3036"/>
-                    </a:solidFill>
-                    <a:latin typeface="Calibri"/>
-                  </a:defRPr>
-                </a:pPr>
-              </a:p>
-            </c:txPr>
-            <c:showLegendKey val="0"/>
-            <c:showVal val="1"/>
-            <c:showCatName val="0"/>
-            <c:showSerName val="0"/>
-            <c:showPercent val="0"/>
-            <c:showBubbleSize val="0"/>
-            <c:showLeaderLines val="0"/>
-          </c:dLbls>
           <c:dPt>
             <c:idx val="0"/>
             <c:invertIfNegative val="0"/>
             <c:bubble3D val="0"/>
-            <c:spPr>
-              <a:solidFill>
-                <a:srgbClr val="C9CED6"/>
-              </a:solidFill>
-              <a:effectLst/>
-            </c:spPr>
+            <c:extLst>
+              <c:ext xmlns:c16="http://schemas.microsoft.com/office/drawing/2014/chart" uri="{C3380CC4-5D6E-409C-BE32-E72D297353CC}">
+                <c16:uniqueId val="{00000001-B32C-4343-B0EB-46554A044DD0}"/>
+              </c:ext>
+            </c:extLst>
           </c:dPt>
           <c:dPt>
             <c:idx val="1"/>
             <c:invertIfNegative val="0"/>
             <c:bubble3D val="0"/>
-            <c:spPr>
-              <a:solidFill>
-                <a:srgbClr val="C9CED6"/>
-              </a:solidFill>
-              <a:effectLst/>
-            </c:spPr>
+            <c:extLst>
+              <c:ext xmlns:c16="http://schemas.microsoft.com/office/drawing/2014/chart" uri="{C3380CC4-5D6E-409C-BE32-E72D297353CC}">
+                <c16:uniqueId val="{00000003-B32C-4343-B0EB-46554A044DD0}"/>
+              </c:ext>
+            </c:extLst>
           </c:dPt>
           <c:dPt>
             <c:idx val="2"/>
             <c:invertIfNegative val="0"/>
             <c:bubble3D val="0"/>
-            <c:spPr>
-              <a:solidFill>
-                <a:srgbClr val="C9CED6"/>
-              </a:solidFill>
-              <a:effectLst/>
-            </c:spPr>
+            <c:extLst>
+              <c:ext xmlns:c16="http://schemas.microsoft.com/office/drawing/2014/chart" uri="{C3380CC4-5D6E-409C-BE32-E72D297353CC}">
+                <c16:uniqueId val="{00000005-B32C-4343-B0EB-46554A044DD0}"/>
+              </c:ext>
+            </c:extLst>
           </c:dPt>
           <c:dPt>
             <c:idx val="3"/>
@@ -1339,28 +1299,68 @@
               </a:solidFill>
               <a:effectLst/>
             </c:spPr>
+            <c:extLst>
+              <c:ext xmlns:c16="http://schemas.microsoft.com/office/drawing/2014/chart" uri="{C3380CC4-5D6E-409C-BE32-E72D297353CC}">
+                <c16:uniqueId val="{00000007-B32C-4343-B0EB-46554A044DD0}"/>
+              </c:ext>
+            </c:extLst>
           </c:dPt>
+          <c:dLbls>
+            <c:numFmt formatCode="0.000" sourceLinked="0"/>
+            <c:spPr>
+              <a:noFill/>
+              <a:ln>
+                <a:noFill/>
+              </a:ln>
+              <a:effectLst/>
+            </c:spPr>
+            <c:txPr>
+              <a:bodyPr/>
+              <a:lstStyle/>
+              <a:p>
+                <a:pPr>
+                  <a:defRPr sz="1300" b="0" i="0" u="none" strike="noStrike">
+                    <a:solidFill>
+                      <a:srgbClr val="2B3036"/>
+                    </a:solidFill>
+                    <a:latin typeface="Calibri"/>
+                  </a:defRPr>
+                </a:pPr>
+                <a:endParaRPr lang="en-US"/>
+              </a:p>
+            </c:txPr>
+            <c:showLegendKey val="0"/>
+            <c:showVal val="1"/>
+            <c:showCatName val="0"/>
+            <c:showSerName val="0"/>
+            <c:showPercent val="0"/>
+            <c:showBubbleSize val="0"/>
+            <c:showLeaderLines val="0"/>
+            <c:extLst>
+              <c:ext xmlns:c15="http://schemas.microsoft.com/office/drawing/2012/chart" uri="{CE6537A1-D6FC-4f65-9D91-7224C49458BB}">
+                <c15:showLeaderLines val="0"/>
+              </c:ext>
+            </c:extLst>
+          </c:dLbls>
           <c:cat>
-            <c:multiLvlStrRef>
+            <c:strRef>
               <c:f>Sheet1!$A$2:$A$5</c:f>
-              <c:multiLvlStrCache>
+              <c:strCache>
                 <c:ptCount val="4"/>
-                <c:lvl>
-                  <c:pt idx="0">
-                    <c:v>Logistic Regression</c:v>
-                  </c:pt>
-                  <c:pt idx="1">
-                    <c:v>Random Forest</c:v>
-                  </c:pt>
-                  <c:pt idx="2">
-                    <c:v>XGBoost</c:v>
-                  </c:pt>
-                  <c:pt idx="3">
-                    <c:v>LightGBM</c:v>
-                  </c:pt>
-                </c:lvl>
-              </c:multiLvlStrCache>
-            </c:multiLvlStrRef>
+                <c:pt idx="0">
+                  <c:v>Logistic Regression</c:v>
+                </c:pt>
+                <c:pt idx="1">
+                  <c:v>Random Forest</c:v>
+                </c:pt>
+                <c:pt idx="2">
+                  <c:v>XGBoost</c:v>
+                </c:pt>
+                <c:pt idx="3">
+                  <c:v>LightGBM</c:v>
+                </c:pt>
+              </c:strCache>
+            </c:strRef>
           </c:cat>
           <c:val>
             <c:numRef>
@@ -1375,44 +1375,31 @@
                   <c:v>0.254</c:v>
                 </c:pt>
                 <c:pt idx="2">
-                  <c:v>0.2814</c:v>
+                  <c:v>0.28139999999999998</c:v>
                 </c:pt>
                 <c:pt idx="3">
-                  <c:v>0.2817</c:v>
+                  <c:v>0.28170000000000001</c:v>
                 </c:pt>
               </c:numCache>
             </c:numRef>
           </c:val>
+          <c:extLst>
+            <c:ext xmlns:c16="http://schemas.microsoft.com/office/drawing/2014/chart" uri="{C3380CC4-5D6E-409C-BE32-E72D297353CC}">
+              <c16:uniqueId val="{00000008-B32C-4343-B0EB-46554A044DD0}"/>
+            </c:ext>
+          </c:extLst>
         </c:ser>
         <c:dLbls>
-          <c:numFmt formatCode="0.000" sourceLinked="0"/>
-          <c:txPr>
-            <a:bodyPr/>
-            <a:lstStyle/>
-            <a:p>
-              <a:pPr>
-                <a:defRPr b="0" i="0" strike="noStrike" sz="1300" u="none">
-                  <a:solidFill>
-                    <a:srgbClr val="2B3036"/>
-                  </a:solidFill>
-                  <a:latin typeface="Calibri"/>
-                </a:defRPr>
-              </a:pPr>
-            </a:p>
-          </c:txPr>
           <c:showLegendKey val="0"/>
           <c:showVal val="1"/>
           <c:showCatName val="0"/>
           <c:showSerName val="0"/>
           <c:showPercent val="0"/>
           <c:showBubbleSize val="0"/>
-          <c:showLeaderLines val="0"/>
         </c:dLbls>
         <c:gapWidth val="40"/>
-        <c:overlap val="0"/>
         <c:axId val="2094734554"/>
         <c:axId val="2094734552"/>
-        <c:axId val="2094734556"/>
       </c:barChart>
       <c:catAx>
         <c:axId val="2094734554"/>
@@ -1453,6 +1440,7 @@
         <c:crosses val="autoZero"/>
         <c:auto val="1"/>
         <c:lblAlgn val="ctr"/>
+        <c:lblOffset val="100"/>
         <c:noMultiLvlLbl val="1"/>
       </c:catAx>
       <c:valAx>
@@ -1468,30 +1456,6 @@
         <c:majorTickMark val="out"/>
         <c:minorTickMark val="none"/>
         <c:tickLblPos val="low"/>
-        <c:spPr>
-          <a:ln w="12700" cap="flat">
-            <a:solidFill>
-              <a:srgbClr val="888888"/>
-            </a:solidFill>
-            <a:prstDash val="solid"/>
-            <a:round/>
-          </a:ln>
-        </c:spPr>
-        <c:txPr>
-          <a:bodyPr/>
-          <a:lstStyle/>
-          <a:p>
-            <a:pPr>
-              <a:defRPr sz="1200" b="0" i="0" u="none" strike="noStrike">
-                <a:solidFill>
-                  <a:srgbClr val="6B7280"/>
-                </a:solidFill>
-                <a:latin typeface="Calibri"/>
-              </a:defRPr>
-            </a:pPr>
-            <a:endParaRPr lang="en-US"/>
-          </a:p>
-        </c:txPr>
         <c:crossAx val="2094734554"/>
         <c:crosses val="autoZero"/>
         <c:crossBetween val="between"/>
@@ -1506,6 +1470,7 @@
     </c:plotArea>
     <c:plotVisOnly val="1"/>
     <c:dispBlanksAs val="span"/>
+    <c:showDLblsOverMax val="1"/>
   </c:chart>
   <c:spPr>
     <a:noFill/>
@@ -1521,9 +1486,11 @@
 </file>
 
 <file path=ppt/charts/chart5.xml><?xml version="1.0" encoding="utf-8"?>
-<c:chartSpace xmlns:c="http://schemas.openxmlformats.org/drawingml/2006/chart" xmlns:a="http://schemas.openxmlformats.org/drawingml/2006/main" xmlns:r="http://schemas.openxmlformats.org/officeDocument/2006/relationships">
+<c:chartSpace xmlns:c="http://schemas.openxmlformats.org/drawingml/2006/chart" xmlns:a="http://schemas.openxmlformats.org/drawingml/2006/main" xmlns:r="http://schemas.openxmlformats.org/officeDocument/2006/relationships" xmlns:c16r2="http://schemas.microsoft.com/office/drawing/2015/06/chart">
   <c:date1904 val="0"/>
+  <c:lang val="en-US"/>
   <c:roundedCorners val="1"/>
+  <c:style val="2"/>
   <c:chart>
     <c:title>
       <c:tx>
@@ -1540,7 +1507,7 @@
               </a:defRPr>
             </a:pPr>
             <a:r>
-              <a:rPr sz="1600" b="0" i="0" u="none" strike="noStrike">
+              <a:rPr lang="en-ID" sz="1600" b="0" i="0" u="none" strike="noStrike">
                 <a:solidFill>
                   <a:srgbClr val="FFFFFF"/>
                 </a:solidFill>
@@ -1551,7 +1518,6 @@
           </a:p>
         </c:rich>
       </c:tx>
-      <c:layout/>
       <c:overlay val="0"/>
     </c:title>
     <c:autoTitleDeleted val="0"/>
@@ -1582,95 +1548,65 @@
             <a:effectLst/>
           </c:spPr>
           <c:invertIfNegative val="0"/>
-          <c:dLbls>
-            <c:numFmt formatCode="0.000" sourceLinked="0"/>
-            <c:txPr>
-              <a:bodyPr/>
-              <a:lstStyle/>
-              <a:p>
-                <a:pPr>
-                  <a:defRPr b="0" i="0" strike="noStrike" sz="1300" u="none">
-                    <a:solidFill>
-                      <a:srgbClr val="D5D9DE"/>
-                    </a:solidFill>
-                    <a:latin typeface="Calibri"/>
-                  </a:defRPr>
-                </a:pPr>
-              </a:p>
-            </c:txPr>
-            <c:showLegendKey val="0"/>
-            <c:showVal val="1"/>
-            <c:showCatName val="0"/>
-            <c:showSerName val="0"/>
-            <c:showPercent val="0"/>
-            <c:showBubbleSize val="0"/>
-            <c:showLeaderLines val="0"/>
-          </c:dLbls>
           <c:dPt>
             <c:idx val="0"/>
             <c:invertIfNegative val="0"/>
             <c:bubble3D val="0"/>
-            <c:spPr>
-              <a:solidFill>
-                <a:srgbClr val="8C96A0"/>
-              </a:solidFill>
-              <a:effectLst/>
-            </c:spPr>
+            <c:extLst>
+              <c:ext xmlns:c16="http://schemas.microsoft.com/office/drawing/2014/chart" uri="{C3380CC4-5D6E-409C-BE32-E72D297353CC}">
+                <c16:uniqueId val="{00000001-52BE-4536-B9FF-C3E3E0CE935E}"/>
+              </c:ext>
+            </c:extLst>
           </c:dPt>
           <c:dPt>
             <c:idx val="1"/>
             <c:invertIfNegative val="0"/>
             <c:bubble3D val="0"/>
-            <c:spPr>
-              <a:solidFill>
-                <a:srgbClr val="8C96A0"/>
-              </a:solidFill>
-              <a:effectLst/>
-            </c:spPr>
+            <c:extLst>
+              <c:ext xmlns:c16="http://schemas.microsoft.com/office/drawing/2014/chart" uri="{C3380CC4-5D6E-409C-BE32-E72D297353CC}">
+                <c16:uniqueId val="{00000003-52BE-4536-B9FF-C3E3E0CE935E}"/>
+              </c:ext>
+            </c:extLst>
           </c:dPt>
           <c:dPt>
             <c:idx val="2"/>
             <c:invertIfNegative val="0"/>
             <c:bubble3D val="0"/>
-            <c:spPr>
-              <a:solidFill>
-                <a:srgbClr val="8C96A0"/>
-              </a:solidFill>
-              <a:effectLst/>
-            </c:spPr>
+            <c:extLst>
+              <c:ext xmlns:c16="http://schemas.microsoft.com/office/drawing/2014/chart" uri="{C3380CC4-5D6E-409C-BE32-E72D297353CC}">
+                <c16:uniqueId val="{00000005-52BE-4536-B9FF-C3E3E0CE935E}"/>
+              </c:ext>
+            </c:extLst>
           </c:dPt>
           <c:dPt>
             <c:idx val="3"/>
             <c:invertIfNegative val="0"/>
             <c:bubble3D val="0"/>
-            <c:spPr>
-              <a:solidFill>
-                <a:srgbClr val="8C96A0"/>
-              </a:solidFill>
-              <a:effectLst/>
-            </c:spPr>
+            <c:extLst>
+              <c:ext xmlns:c16="http://schemas.microsoft.com/office/drawing/2014/chart" uri="{C3380CC4-5D6E-409C-BE32-E72D297353CC}">
+                <c16:uniqueId val="{00000007-52BE-4536-B9FF-C3E3E0CE935E}"/>
+              </c:ext>
+            </c:extLst>
           </c:dPt>
           <c:dPt>
             <c:idx val="4"/>
             <c:invertIfNegative val="0"/>
             <c:bubble3D val="0"/>
-            <c:spPr>
-              <a:solidFill>
-                <a:srgbClr val="8C96A0"/>
-              </a:solidFill>
-              <a:effectLst/>
-            </c:spPr>
+            <c:extLst>
+              <c:ext xmlns:c16="http://schemas.microsoft.com/office/drawing/2014/chart" uri="{C3380CC4-5D6E-409C-BE32-E72D297353CC}">
+                <c16:uniqueId val="{00000009-52BE-4536-B9FF-C3E3E0CE935E}"/>
+              </c:ext>
+            </c:extLst>
           </c:dPt>
           <c:dPt>
             <c:idx val="5"/>
             <c:invertIfNegative val="0"/>
             <c:bubble3D val="0"/>
-            <c:spPr>
-              <a:solidFill>
-                <a:srgbClr val="8C96A0"/>
-              </a:solidFill>
-              <a:effectLst/>
-            </c:spPr>
+            <c:extLst>
+              <c:ext xmlns:c16="http://schemas.microsoft.com/office/drawing/2014/chart" uri="{C3380CC4-5D6E-409C-BE32-E72D297353CC}">
+                <c16:uniqueId val="{0000000B-52BE-4536-B9FF-C3E3E0CE935E}"/>
+              </c:ext>
+            </c:extLst>
           </c:dPt>
           <c:dPt>
             <c:idx val="6"/>
@@ -1682,37 +1618,77 @@
               </a:solidFill>
               <a:effectLst/>
             </c:spPr>
+            <c:extLst>
+              <c:ext xmlns:c16="http://schemas.microsoft.com/office/drawing/2014/chart" uri="{C3380CC4-5D6E-409C-BE32-E72D297353CC}">
+                <c16:uniqueId val="{0000000D-52BE-4536-B9FF-C3E3E0CE935E}"/>
+              </c:ext>
+            </c:extLst>
           </c:dPt>
+          <c:dLbls>
+            <c:numFmt formatCode="0.000" sourceLinked="0"/>
+            <c:spPr>
+              <a:noFill/>
+              <a:ln>
+                <a:noFill/>
+              </a:ln>
+              <a:effectLst/>
+            </c:spPr>
+            <c:txPr>
+              <a:bodyPr/>
+              <a:lstStyle/>
+              <a:p>
+                <a:pPr>
+                  <a:defRPr sz="1300" b="0" i="0" u="none" strike="noStrike">
+                    <a:solidFill>
+                      <a:srgbClr val="D5D9DE"/>
+                    </a:solidFill>
+                    <a:latin typeface="Calibri"/>
+                  </a:defRPr>
+                </a:pPr>
+                <a:endParaRPr lang="en-US"/>
+              </a:p>
+            </c:txPr>
+            <c:showLegendKey val="0"/>
+            <c:showVal val="1"/>
+            <c:showCatName val="0"/>
+            <c:showSerName val="0"/>
+            <c:showPercent val="0"/>
+            <c:showBubbleSize val="0"/>
+            <c:showLeaderLines val="0"/>
+            <c:extLst>
+              <c:ext xmlns:c15="http://schemas.microsoft.com/office/drawing/2012/chart" uri="{CE6537A1-D6FC-4f65-9D91-7224C49458BB}">
+                <c15:showLeaderLines val="0"/>
+              </c:ext>
+            </c:extLst>
+          </c:dLbls>
           <c:cat>
-            <c:multiLvlStrRef>
+            <c:strRef>
               <c:f>Sheet1!$A$2:$A$8</c:f>
-              <c:multiLvlStrCache>
+              <c:strCache>
                 <c:ptCount val="7"/>
-                <c:lvl>
-                  <c:pt idx="0">
-                    <c:v>Lama riwayat kredit barang</c:v>
-                  </c:pt>
-                  <c:pt idx="1">
-                    <c:v>Skor eksternal 3</c:v>
-                  </c:pt>
-                  <c:pt idx="2">
-                    <c:v>Pinjaman / harga barang</c:v>
-                  </c:pt>
-                  <c:pt idx="3">
-                    <c:v>Skor eksternal 2</c:v>
-                  </c:pt>
-                  <c:pt idx="4">
-                    <c:v>Besar cicilan</c:v>
-                  </c:pt>
-                  <c:pt idx="5">
-                    <c:v>Perkiraan tenor</c:v>
-                  </c:pt>
-                  <c:pt idx="6">
-                    <c:v>Rata-rata skor eksternal</c:v>
-                  </c:pt>
-                </c:lvl>
-              </c:multiLvlStrCache>
-            </c:multiLvlStrRef>
+                <c:pt idx="0">
+                  <c:v>Lama riwayat kredit barang</c:v>
+                </c:pt>
+                <c:pt idx="1">
+                  <c:v>Skor eksternal 3</c:v>
+                </c:pt>
+                <c:pt idx="2">
+                  <c:v>Pinjaman / harga barang</c:v>
+                </c:pt>
+                <c:pt idx="3">
+                  <c:v>Skor eksternal 2</c:v>
+                </c:pt>
+                <c:pt idx="4">
+                  <c:v>Besar cicilan</c:v>
+                </c:pt>
+                <c:pt idx="5">
+                  <c:v>Perkiraan tenor</c:v>
+                </c:pt>
+                <c:pt idx="6">
+                  <c:v>Rata-rata skor eksternal</c:v>
+                </c:pt>
+              </c:strCache>
+            </c:strRef>
           </c:cat>
           <c:val>
             <c:numRef>
@@ -1721,10 +1697,10 @@
                 <c:formatCode>General</c:formatCode>
                 <c:ptCount val="7"/>
                 <c:pt idx="0">
-                  <c:v>0.096</c:v>
+                  <c:v>9.6000000000000002E-2</c:v>
                 </c:pt>
                 <c:pt idx="1">
-                  <c:v>0.099</c:v>
+                  <c:v>9.9000000000000005E-2</c:v>
                 </c:pt>
                 <c:pt idx="2">
                   <c:v>0.111</c:v>
@@ -1733,7 +1709,7 @@
                   <c:v>0.112</c:v>
                 </c:pt>
                 <c:pt idx="4">
-                  <c:v>0.117</c:v>
+                  <c:v>0.11700000000000001</c:v>
                 </c:pt>
                 <c:pt idx="5">
                   <c:v>0.12</c:v>
@@ -1744,36 +1720,23 @@
               </c:numCache>
             </c:numRef>
           </c:val>
+          <c:extLst>
+            <c:ext xmlns:c16="http://schemas.microsoft.com/office/drawing/2014/chart" uri="{C3380CC4-5D6E-409C-BE32-E72D297353CC}">
+              <c16:uniqueId val="{0000000E-52BE-4536-B9FF-C3E3E0CE935E}"/>
+            </c:ext>
+          </c:extLst>
         </c:ser>
         <c:dLbls>
-          <c:numFmt formatCode="0.000" sourceLinked="0"/>
-          <c:txPr>
-            <a:bodyPr/>
-            <a:lstStyle/>
-            <a:p>
-              <a:pPr>
-                <a:defRPr b="0" i="0" strike="noStrike" sz="1300" u="none">
-                  <a:solidFill>
-                    <a:srgbClr val="D5D9DE"/>
-                  </a:solidFill>
-                  <a:latin typeface="Calibri"/>
-                </a:defRPr>
-              </a:pPr>
-            </a:p>
-          </c:txPr>
           <c:showLegendKey val="0"/>
           <c:showVal val="1"/>
           <c:showCatName val="0"/>
           <c:showSerName val="0"/>
           <c:showPercent val="0"/>
           <c:showBubbleSize val="0"/>
-          <c:showLeaderLines val="0"/>
         </c:dLbls>
         <c:gapWidth val="30"/>
-        <c:overlap val="0"/>
         <c:axId val="2094734554"/>
         <c:axId val="2094734552"/>
-        <c:axId val="2094734556"/>
       </c:barChart>
       <c:catAx>
         <c:axId val="2094734554"/>
@@ -1814,6 +1777,7 @@
         <c:crosses val="autoZero"/>
         <c:auto val="1"/>
         <c:lblAlgn val="ctr"/>
+        <c:lblOffset val="100"/>
         <c:noMultiLvlLbl val="1"/>
       </c:catAx>
       <c:valAx>
@@ -1828,30 +1792,6 @@
         <c:majorTickMark val="out"/>
         <c:minorTickMark val="none"/>
         <c:tickLblPos val="low"/>
-        <c:spPr>
-          <a:ln w="12700" cap="flat">
-            <a:solidFill>
-              <a:srgbClr val="888888"/>
-            </a:solidFill>
-            <a:prstDash val="solid"/>
-            <a:round/>
-          </a:ln>
-        </c:spPr>
-        <c:txPr>
-          <a:bodyPr/>
-          <a:lstStyle/>
-          <a:p>
-            <a:pPr>
-              <a:defRPr sz="1200" b="0" i="0" u="none" strike="noStrike">
-                <a:solidFill>
-                  <a:srgbClr val="6B7280"/>
-                </a:solidFill>
-                <a:latin typeface="Calibri"/>
-              </a:defRPr>
-            </a:pPr>
-            <a:endParaRPr lang="en-US"/>
-          </a:p>
-        </c:txPr>
         <c:crossAx val="2094734554"/>
         <c:crosses val="autoZero"/>
         <c:crossBetween val="between"/>
@@ -1866,6 +1806,7 @@
     </c:plotArea>
     <c:plotVisOnly val="1"/>
     <c:dispBlanksAs val="span"/>
+    <c:showDLblsOverMax val="1"/>
   </c:chart>
   <c:spPr>
     <a:noFill/>
@@ -1881,9 +1822,11 @@
 </file>
 
 <file path=ppt/charts/chart6.xml><?xml version="1.0" encoding="utf-8"?>
-<c:chartSpace xmlns:c="http://schemas.openxmlformats.org/drawingml/2006/chart" xmlns:a="http://schemas.openxmlformats.org/drawingml/2006/main" xmlns:r="http://schemas.openxmlformats.org/officeDocument/2006/relationships">
+<c:chartSpace xmlns:c="http://schemas.openxmlformats.org/drawingml/2006/chart" xmlns:a="http://schemas.openxmlformats.org/drawingml/2006/main" xmlns:r="http://schemas.openxmlformats.org/officeDocument/2006/relationships" xmlns:c16r2="http://schemas.microsoft.com/office/drawing/2015/06/chart">
   <c:date1904 val="0"/>
+  <c:lang val="en-US"/>
   <c:roundedCorners val="1"/>
+  <c:style val="2"/>
   <c:chart>
     <c:title>
       <c:tx>
@@ -1900,7 +1843,7 @@
               </a:defRPr>
             </a:pPr>
             <a:r>
-              <a:rPr sz="1600" b="0" i="0" u="none" strike="noStrike">
+              <a:rPr lang="en-ID" sz="1600" b="0" i="0" u="none" strike="noStrike">
                 <a:solidFill>
                   <a:srgbClr val="2B3036"/>
                 </a:solidFill>
@@ -1911,7 +1854,6 @@
           </a:p>
         </c:rich>
       </c:tx>
-      <c:layout/>
       <c:overlay val="0"/>
     </c:title>
     <c:autoTitleDeleted val="0"/>
@@ -1944,18 +1886,26 @@
           <c:invertIfNegative val="0"/>
           <c:dLbls>
             <c:numFmt formatCode="0.00;;" sourceLinked="0"/>
+            <c:spPr>
+              <a:noFill/>
+              <a:ln>
+                <a:noFill/>
+              </a:ln>
+              <a:effectLst/>
+            </c:spPr>
             <c:txPr>
               <a:bodyPr/>
               <a:lstStyle/>
               <a:p>
                 <a:pPr>
-                  <a:defRPr b="0" i="0" strike="noStrike" sz="1300" u="none">
+                  <a:defRPr sz="1300" b="0" i="0" u="none" strike="noStrike">
                     <a:solidFill>
                       <a:srgbClr val="FFFFFF"/>
                     </a:solidFill>
                     <a:latin typeface="Calibri"/>
                   </a:defRPr>
                 </a:pPr>
+                <a:endParaRPr lang="en-US"/>
               </a:p>
             </c:txPr>
             <c:dLblPos val="ctr"/>
@@ -1966,28 +1916,31 @@
             <c:showPercent val="0"/>
             <c:showBubbleSize val="0"/>
             <c:showLeaderLines val="0"/>
+            <c:extLst>
+              <c:ext xmlns:c15="http://schemas.microsoft.com/office/drawing/2012/chart" uri="{CE6537A1-D6FC-4f65-9D91-7224C49458BB}">
+                <c15:showLeaderLines val="0"/>
+              </c:ext>
+            </c:extLst>
           </c:dLbls>
           <c:cat>
-            <c:multiLvlStrRef>
+            <c:strRef>
               <c:f>Sheet1!$A$2:$A$5</c:f>
-              <c:multiLvlStrCache>
+              <c:strCache>
                 <c:ptCount val="4"/>
-                <c:lvl>
-                  <c:pt idx="0">
-                    <c:v>Tanpa model</c:v>
-                  </c:pt>
-                  <c:pt idx="1">
-                    <c:v>F2 tertinggi</c:v>
-                  </c:pt>
-                  <c:pt idx="2">
-                    <c:v>Terpilih 12%</c:v>
-                  </c:pt>
-                  <c:pt idx="3">
-                    <c:v>Biaya min. 22%</c:v>
-                  </c:pt>
-                </c:lvl>
-              </c:multiLvlStrCache>
-            </c:multiLvlStrRef>
+                <c:pt idx="0">
+                  <c:v>Tanpa model</c:v>
+                </c:pt>
+                <c:pt idx="1">
+                  <c:v>F2 tertinggi</c:v>
+                </c:pt>
+                <c:pt idx="2">
+                  <c:v>Terpilih 12%</c:v>
+                </c:pt>
+                <c:pt idx="3">
+                  <c:v>Biaya min. 22%</c:v>
+                </c:pt>
+              </c:strCache>
+            </c:strRef>
           </c:cat>
           <c:val>
             <c:numRef>
@@ -2002,7 +1955,7 @@
                   <c:v>0.44</c:v>
                 </c:pt>
                 <c:pt idx="2">
-                  <c:v>0.57</c:v>
+                  <c:v>0.56999999999999995</c:v>
                 </c:pt>
                 <c:pt idx="3">
                   <c:v>0.87</c:v>
@@ -2010,6 +1963,11 @@
               </c:numCache>
             </c:numRef>
           </c:val>
+          <c:extLst>
+            <c:ext xmlns:c16="http://schemas.microsoft.com/office/drawing/2014/chart" uri="{C3380CC4-5D6E-409C-BE32-E72D297353CC}">
+              <c16:uniqueId val="{00000000-FC91-464C-A12A-2CC1171C2702}"/>
+            </c:ext>
+          </c:extLst>
         </c:ser>
         <c:ser>
           <c:idx val="1"/>
@@ -2034,18 +1992,26 @@
           <c:invertIfNegative val="0"/>
           <c:dLbls>
             <c:numFmt formatCode="0.00;;" sourceLinked="0"/>
+            <c:spPr>
+              <a:noFill/>
+              <a:ln>
+                <a:noFill/>
+              </a:ln>
+              <a:effectLst/>
+            </c:spPr>
             <c:txPr>
               <a:bodyPr/>
               <a:lstStyle/>
               <a:p>
                 <a:pPr>
-                  <a:defRPr b="0" i="0" strike="noStrike" sz="1300" u="none">
+                  <a:defRPr sz="1300" b="0" i="0" u="none" strike="noStrike">
                     <a:solidFill>
                       <a:srgbClr val="FFFFFF"/>
                     </a:solidFill>
                     <a:latin typeface="Calibri"/>
                   </a:defRPr>
                 </a:pPr>
+                <a:endParaRPr lang="en-US"/>
               </a:p>
             </c:txPr>
             <c:dLblPos val="ctr"/>
@@ -2056,28 +2022,31 @@
             <c:showPercent val="0"/>
             <c:showBubbleSize val="0"/>
             <c:showLeaderLines val="0"/>
+            <c:extLst>
+              <c:ext xmlns:c15="http://schemas.microsoft.com/office/drawing/2012/chart" uri="{CE6537A1-D6FC-4f65-9D91-7224C49458BB}">
+                <c15:showLeaderLines val="0"/>
+              </c:ext>
+            </c:extLst>
           </c:dLbls>
           <c:cat>
-            <c:multiLvlStrRef>
+            <c:strRef>
               <c:f>Sheet1!$A$2:$A$5</c:f>
-              <c:multiLvlStrCache>
+              <c:strCache>
                 <c:ptCount val="4"/>
-                <c:lvl>
-                  <c:pt idx="0">
-                    <c:v>Tanpa model</c:v>
-                  </c:pt>
-                  <c:pt idx="1">
-                    <c:v>F2 tertinggi</c:v>
-                  </c:pt>
-                  <c:pt idx="2">
-                    <c:v>Terpilih 12%</c:v>
-                  </c:pt>
-                  <c:pt idx="3">
-                    <c:v>Biaya min. 22%</c:v>
-                  </c:pt>
-                </c:lvl>
-              </c:multiLvlStrCache>
-            </c:multiLvlStrRef>
+                <c:pt idx="0">
+                  <c:v>Tanpa model</c:v>
+                </c:pt>
+                <c:pt idx="1">
+                  <c:v>F2 tertinggi</c:v>
+                </c:pt>
+                <c:pt idx="2">
+                  <c:v>Terpilih 12%</c:v>
+                </c:pt>
+                <c:pt idx="3">
+                  <c:v>Biaya min. 22%</c:v>
+                </c:pt>
+              </c:strCache>
+            </c:strRef>
           </c:cat>
           <c:val>
             <c:numRef>
@@ -2100,23 +2069,13 @@
               </c:numCache>
             </c:numRef>
           </c:val>
+          <c:extLst>
+            <c:ext xmlns:c16="http://schemas.microsoft.com/office/drawing/2014/chart" uri="{C3380CC4-5D6E-409C-BE32-E72D297353CC}">
+              <c16:uniqueId val="{00000001-FC91-464C-A12A-2CC1171C2702}"/>
+            </c:ext>
+          </c:extLst>
         </c:ser>
         <c:dLbls>
-          <c:numFmt formatCode="0.00;;" sourceLinked="0"/>
-          <c:txPr>
-            <a:bodyPr/>
-            <a:lstStyle/>
-            <a:p>
-              <a:pPr>
-                <a:defRPr b="0" i="0" strike="noStrike" sz="1300" u="none">
-                  <a:solidFill>
-                    <a:srgbClr val="FFFFFF"/>
-                  </a:solidFill>
-                  <a:latin typeface="Calibri"/>
-                </a:defRPr>
-              </a:pPr>
-            </a:p>
-          </c:txPr>
           <c:dLblPos val="ctr"/>
           <c:showLegendKey val="0"/>
           <c:showVal val="1"/>
@@ -2124,13 +2083,11 @@
           <c:showSerName val="0"/>
           <c:showPercent val="0"/>
           <c:showBubbleSize val="0"/>
-          <c:showLeaderLines val="0"/>
         </c:dLbls>
         <c:gapWidth val="45"/>
         <c:overlap val="100"/>
         <c:axId val="2094734554"/>
         <c:axId val="2094734552"/>
-        <c:axId val="2094734556"/>
       </c:barChart>
       <c:catAx>
         <c:axId val="2094734554"/>
@@ -2171,6 +2128,7 @@
         <c:crosses val="autoZero"/>
         <c:auto val="1"/>
         <c:lblAlgn val="ctr"/>
+        <c:lblOffset val="100"/>
         <c:noMultiLvlLbl val="1"/>
       </c:catAx>
       <c:valAx>
@@ -2184,30 +2142,6 @@
         <c:majorTickMark val="out"/>
         <c:minorTickMark val="none"/>
         <c:tickLblPos val="nextTo"/>
-        <c:spPr>
-          <a:ln w="12700" cap="flat">
-            <a:solidFill>
-              <a:srgbClr val="888888"/>
-            </a:solidFill>
-            <a:prstDash val="solid"/>
-            <a:round/>
-          </a:ln>
-        </c:spPr>
-        <c:txPr>
-          <a:bodyPr/>
-          <a:lstStyle/>
-          <a:p>
-            <a:pPr>
-              <a:defRPr sz="1200" b="0" i="0" u="none" strike="noStrike">
-                <a:solidFill>
-                  <a:srgbClr val="6B7280"/>
-                </a:solidFill>
-                <a:latin typeface="Calibri"/>
-              </a:defRPr>
-            </a:pPr>
-            <a:endParaRPr lang="en-US"/>
-          </a:p>
-        </c:txPr>
         <c:crossAx val="2094734554"/>
         <c:crosses val="autoZero"/>
         <c:crossBetween val="between"/>
@@ -2240,6 +2174,7 @@
     </c:legend>
     <c:plotVisOnly val="1"/>
     <c:dispBlanksAs val="span"/>
+    <c:showDLblsOverMax val="1"/>
   </c:chart>
   <c:spPr>
     <a:noFill/>
@@ -2276,234 +2211,10 @@
           <a:chExt cx="0" cy="0"/>
         </a:xfrm>
       </p:grpSpPr>
-      <p:sp>
-        <p:nvSpPr>
-          <p:cNvPr id="2" name="Header Placeholder 1"/>
-          <p:cNvSpPr>
-            <a:spLocks noGrp="1"/>
-          </p:cNvSpPr>
-          <p:nvPr>
-            <p:ph type="hdr" sz="quarter"/>
-          </p:nvPr>
-        </p:nvSpPr>
-        <p:spPr>
-          <a:xfrm>
-            <a:off x="0" y="0"/>
-            <a:ext cx="2971800" cy="458788"/>
-          </a:xfrm>
-          <a:prstGeom prst="rect">
-            <a:avLst/>
-          </a:prstGeom>
-        </p:spPr>
-        <p:txBody>
-          <a:bodyPr vert="horz" lIns="91440" tIns="45720" rIns="91440" bIns="45720" rtlCol="0"/>
-          <a:lstStyle>
-            <a:lvl1pPr algn="l">
-              <a:defRPr sz="1200"/>
-            </a:lvl1pPr>
-          </a:lstStyle>
-          <a:p>
-            <a:endParaRPr lang="en-US"/>
-          </a:p>
-        </p:txBody>
-      </p:sp>
-      <p:sp>
-        <p:nvSpPr>
-          <p:cNvPr id="3" name="Date Placeholder 2"/>
-          <p:cNvSpPr>
-            <a:spLocks noGrp="1"/>
-          </p:cNvSpPr>
-          <p:nvPr>
-            <p:ph type="dt" idx="1"/>
-          </p:nvPr>
-        </p:nvSpPr>
-        <p:spPr>
-          <a:xfrm>
-            <a:off x="3884613" y="0"/>
-            <a:ext cx="2971800" cy="458788"/>
-          </a:xfrm>
-          <a:prstGeom prst="rect">
-            <a:avLst/>
-          </a:prstGeom>
-        </p:spPr>
-        <p:txBody>
-          <a:bodyPr vert="horz" lIns="91440" tIns="45720" rIns="91440" bIns="45720" rtlCol="0"/>
-          <a:lstStyle>
-            <a:lvl1pPr algn="r">
-              <a:defRPr sz="1200"/>
-            </a:lvl1pPr>
-          </a:lstStyle>
-          <a:p>
-            <a:fld id="{5282F153-3F37-0F45-9E97-73ACFA13230C}" type="datetimeFigureOut">
-              <a:rPr lang="en-US"/>
-              <a:t>7/23/19</a:t>
-            </a:fld>
-            <a:endParaRPr lang="en-US"/>
-          </a:p>
-        </p:txBody>
-      </p:sp>
-      <p:sp>
-        <p:nvSpPr>
-          <p:cNvPr id="4" name="Slide Image Placeholder 3"/>
-          <p:cNvSpPr>
-            <a:spLocks noGrp="1" noRot="1" noChangeAspect="1"/>
-          </p:cNvSpPr>
-          <p:nvPr>
-            <p:ph type="sldImg" idx="2"/>
-          </p:nvPr>
-        </p:nvSpPr>
-        <p:spPr>
-          <a:xfrm>
-            <a:off x="685800" y="1143000"/>
-            <a:ext cx="5486400" cy="3086100"/>
-          </a:xfrm>
-          <a:prstGeom prst="rect">
-            <a:avLst/>
-          </a:prstGeom>
-          <a:noFill/>
-          <a:ln w="12700">
-            <a:solidFill>
-              <a:prstClr val="black"/>
-            </a:solidFill>
-          </a:ln>
-        </p:spPr>
-        <p:txBody>
-          <a:bodyPr vert="horz" lIns="91440" tIns="45720" rIns="91440" bIns="45720" rtlCol="0" anchor="ctr"/>
-          <a:lstStyle/>
-          <a:p>
-            <a:endParaRPr lang="en-US"/>
-          </a:p>
-        </p:txBody>
-      </p:sp>
-      <p:sp>
-        <p:nvSpPr>
-          <p:cNvPr id="5" name="Notes Placeholder 4"/>
-          <p:cNvSpPr>
-            <a:spLocks noGrp="1"/>
-          </p:cNvSpPr>
-          <p:nvPr>
-            <p:ph type="body" sz="quarter" idx="3"/>
-          </p:nvPr>
-        </p:nvSpPr>
-        <p:spPr>
-          <a:xfrm>
-            <a:off x="685800" y="4400550"/>
-            <a:ext cx="5486400" cy="3600450"/>
-          </a:xfrm>
-          <a:prstGeom prst="rect">
-            <a:avLst/>
-          </a:prstGeom>
-        </p:spPr>
-        <p:txBody>
-          <a:bodyPr vert="horz" lIns="91440" tIns="45720" rIns="91440" bIns="45720" rtlCol="0"/>
-          <a:lstStyle/>
-          <a:p>
-            <a:pPr lvl="0"/>
-            <a:r>
-              <a:rPr lang="en-US"/>
-              <a:t>Click to edit Master text styles</a:t>
-            </a:r>
-          </a:p>
-          <a:p>
-            <a:pPr lvl="1"/>
-            <a:r>
-              <a:rPr lang="en-US"/>
-              <a:t>Second level</a:t>
-            </a:r>
-          </a:p>
-          <a:p>
-            <a:pPr lvl="2"/>
-            <a:r>
-              <a:rPr lang="en-US"/>
-              <a:t>Third level</a:t>
-            </a:r>
-          </a:p>
-          <a:p>
-            <a:pPr lvl="3"/>
-            <a:r>
-              <a:rPr lang="en-US"/>
-              <a:t>Fourth level</a:t>
-            </a:r>
-          </a:p>
-          <a:p>
-            <a:pPr lvl="4"/>
-            <a:r>
-              <a:rPr lang="en-US"/>
-              <a:t>Fifth level</a:t>
-            </a:r>
-          </a:p>
-        </p:txBody>
-      </p:sp>
-      <p:sp>
-        <p:nvSpPr>
-          <p:cNvPr id="6" name="Footer Placeholder 5"/>
-          <p:cNvSpPr>
-            <a:spLocks noGrp="1"/>
-          </p:cNvSpPr>
-          <p:nvPr>
-            <p:ph type="ftr" sz="quarter" idx="4"/>
-          </p:nvPr>
-        </p:nvSpPr>
-        <p:spPr>
-          <a:xfrm>
-            <a:off x="0" y="8685213"/>
-            <a:ext cx="2971800" cy="458787"/>
-          </a:xfrm>
-          <a:prstGeom prst="rect">
-            <a:avLst/>
-          </a:prstGeom>
-        </p:spPr>
-        <p:txBody>
-          <a:bodyPr vert="horz" lIns="91440" tIns="45720" rIns="91440" bIns="45720" rtlCol="0" anchor="b"/>
-          <a:lstStyle>
-            <a:lvl1pPr algn="l">
-              <a:defRPr sz="1200"/>
-            </a:lvl1pPr>
-          </a:lstStyle>
-          <a:p>
-            <a:endParaRPr lang="en-US"/>
-          </a:p>
-        </p:txBody>
-      </p:sp>
-      <p:sp>
-        <p:nvSpPr>
-          <p:cNvPr id="7" name="Slide Number Placeholder 6"/>
-          <p:cNvSpPr>
-            <a:spLocks noGrp="1"/>
-          </p:cNvSpPr>
-          <p:nvPr>
-            <p:ph type="sldNum" sz="quarter" idx="5"/>
-          </p:nvPr>
-        </p:nvSpPr>
-        <p:spPr>
-          <a:xfrm>
-            <a:off x="3884613" y="8685213"/>
-            <a:ext cx="2971800" cy="458787"/>
-          </a:xfrm>
-          <a:prstGeom prst="rect">
-            <a:avLst/>
-          </a:prstGeom>
-        </p:spPr>
-        <p:txBody>
-          <a:bodyPr vert="horz" lIns="91440" tIns="45720" rIns="91440" bIns="45720" rtlCol="0" anchor="b"/>
-          <a:lstStyle>
-            <a:lvl1pPr algn="r">
-              <a:defRPr sz="1200"/>
-            </a:lvl1pPr>
-          </a:lstStyle>
-          <a:p>
-            <a:fld id="{CE5E9CC1-C706-0F49-92D6-E571CC5EEA8F}" type="slidenum">
-              <a:rPr lang="en-US"/>
-              <a:t>‹#›</a:t>
-            </a:fld>
-            <a:endParaRPr lang="en-US"/>
-          </a:p>
-        </p:txBody>
-      </p:sp>
     </p:spTree>
     <p:extLst>
       <p:ext uri="{BB962C8B-B14F-4D97-AF65-F5344CB8AC3E}">
-        <p14:creationId xmlns:p14="http://schemas.microsoft.com/office/powerpoint/2010/main" val="1024086991"/>
+        <p14:creationId xmlns:p14="http://schemas.microsoft.com/office/powerpoint/2010/main" val="2721554174"/>
       </p:ext>
     </p:extLst>
   </p:cSld>
@@ -2647,10 +2358,6 @@
           <a:bodyPr/>
           <a:lstStyle/>
           <a:p>
-            <a:r>
-              <a:rPr lang="en-US" dirty="0"/>
-              <a:t/>
-            </a:r>
             <a:endParaRPr lang="en-US" dirty="0"/>
           </a:p>
         </p:txBody>
@@ -2735,10 +2442,6 @@
           <a:bodyPr/>
           <a:lstStyle/>
           <a:p>
-            <a:r>
-              <a:rPr lang="en-US" dirty="0"/>
-              <a:t/>
-            </a:r>
             <a:endParaRPr lang="en-US" dirty="0"/>
           </a:p>
         </p:txBody>
@@ -2823,10 +2526,6 @@
           <a:bodyPr/>
           <a:lstStyle/>
           <a:p>
-            <a:r>
-              <a:rPr lang="en-US" dirty="0"/>
-              <a:t/>
-            </a:r>
             <a:endParaRPr lang="en-US" dirty="0"/>
           </a:p>
         </p:txBody>
@@ -2911,10 +2610,6 @@
           <a:bodyPr/>
           <a:lstStyle/>
           <a:p>
-            <a:r>
-              <a:rPr lang="en-US" dirty="0"/>
-              <a:t/>
-            </a:r>
             <a:endParaRPr lang="en-US" dirty="0"/>
           </a:p>
         </p:txBody>
@@ -2999,10 +2694,6 @@
           <a:bodyPr/>
           <a:lstStyle/>
           <a:p>
-            <a:r>
-              <a:rPr lang="en-US" dirty="0"/>
-              <a:t/>
-            </a:r>
             <a:endParaRPr lang="en-US" dirty="0"/>
           </a:p>
         </p:txBody>
@@ -3087,10 +2778,6 @@
           <a:bodyPr/>
           <a:lstStyle/>
           <a:p>
-            <a:r>
-              <a:rPr lang="en-US" dirty="0"/>
-              <a:t/>
-            </a:r>
             <a:endParaRPr lang="en-US" dirty="0"/>
           </a:p>
         </p:txBody>
@@ -3175,10 +2862,6 @@
           <a:bodyPr/>
           <a:lstStyle/>
           <a:p>
-            <a:r>
-              <a:rPr lang="en-US" dirty="0"/>
-              <a:t/>
-            </a:r>
             <a:endParaRPr lang="en-US" dirty="0"/>
           </a:p>
         </p:txBody>
@@ -3263,10 +2946,6 @@
           <a:bodyPr/>
           <a:lstStyle/>
           <a:p>
-            <a:r>
-              <a:rPr lang="en-US" dirty="0"/>
-              <a:t/>
-            </a:r>
             <a:endParaRPr lang="en-US" dirty="0"/>
           </a:p>
         </p:txBody>
@@ -3351,10 +3030,6 @@
           <a:bodyPr/>
           <a:lstStyle/>
           <a:p>
-            <a:r>
-              <a:rPr lang="en-US" dirty="0"/>
-              <a:t/>
-            </a:r>
             <a:endParaRPr lang="en-US" dirty="0"/>
           </a:p>
         </p:txBody>
@@ -3439,10 +3114,6 @@
           <a:bodyPr/>
           <a:lstStyle/>
           <a:p>
-            <a:r>
-              <a:rPr lang="en-US" dirty="0"/>
-              <a:t/>
-            </a:r>
             <a:endParaRPr lang="en-US" dirty="0"/>
           </a:p>
         </p:txBody>
@@ -3516,6 +3187,11 @@
 <file path=ppt/slideMasters/slideMaster1.xml><?xml version="1.0" encoding="utf-8"?>
 <p:sldMaster xmlns:a="http://schemas.openxmlformats.org/drawingml/2006/main" xmlns:r="http://schemas.openxmlformats.org/officeDocument/2006/relationships" xmlns:p="http://schemas.openxmlformats.org/presentationml/2006/main">
   <p:cSld>
+    <p:bg>
+      <p:bgRef idx="1001">
+        <a:schemeClr val="bg1"/>
+      </p:bgRef>
+    </p:bg>
     <p:spTree>
       <p:nvGrpSpPr>
         <p:cNvPr id="1" name=""/>
@@ -3798,6 +3474,7 @@
         <a:solidFill>
           <a:srgbClr val="1F2328"/>
         </a:solidFill>
+        <a:effectLst/>
       </p:bgPr>
     </p:bg>
     <p:spTree>
@@ -3835,11 +3512,11 @@
           <a:bodyPr wrap="square" lIns="0" tIns="0" rIns="0" bIns="0" rtlCol="0" anchor="ctr"/>
           <a:lstStyle/>
           <a:p>
-            <a:pPr indent="0" marL="0">
-              <a:buNone/>
-            </a:pPr>
-            <a:r>
-              <a:rPr lang="en-US" sz="1400" b="1" spc="200" kern="0" dirty="0">
+            <a:pPr marL="0" indent="0">
+              <a:buNone/>
+            </a:pPr>
+            <a:r>
+              <a:rPr lang="en-US" sz="1400" b="1" kern="0" spc="200" dirty="0">
                 <a:solidFill>
                   <a:srgbClr val="F06A78"/>
                 </a:solidFill>
@@ -3871,7 +3548,7 @@
           <a:bodyPr wrap="square" lIns="0" tIns="0" rIns="0" bIns="0" rtlCol="0" anchor="ctr"/>
           <a:lstStyle/>
           <a:p>
-            <a:pPr indent="0" marL="0">
+            <a:pPr marL="0" indent="0">
               <a:buNone/>
             </a:pPr>
             <a:r>
@@ -3910,7 +3587,7 @@
           <a:bodyPr wrap="square" lIns="0" tIns="0" rIns="0" bIns="0" rtlCol="0" anchor="ctr"/>
           <a:lstStyle/>
           <a:p>
-            <a:pPr indent="0" marL="0">
+            <a:pPr marL="0" indent="0">
               <a:buNone/>
             </a:pPr>
             <a:r>
@@ -3946,7 +3623,7 @@
           <a:bodyPr wrap="square" lIns="0" tIns="0" rIns="0" bIns="0" rtlCol="0" anchor="ctr"/>
           <a:lstStyle/>
           <a:p>
-            <a:pPr indent="0" marL="0">
+            <a:pPr marL="0" indent="0">
               <a:buNone/>
             </a:pPr>
             <a:r>
@@ -4009,7 +3686,7 @@
           <a:bodyPr wrap="square" lIns="0" tIns="0" rIns="0" bIns="0" rtlCol="0" anchor="ctr"/>
           <a:lstStyle/>
           <a:p>
-            <a:pPr indent="0" marL="0">
+            <a:pPr marL="0" indent="0">
               <a:buNone/>
             </a:pPr>
             <a:r>
@@ -4048,7 +3725,7 @@
           <a:bodyPr wrap="square" lIns="0" tIns="0" rIns="0" bIns="0" rtlCol="0" anchor="t"/>
           <a:lstStyle/>
           <a:p>
-            <a:pPr indent="0" marL="0">
+            <a:pPr marL="0" indent="0">
               <a:buNone/>
             </a:pPr>
             <a:r>
@@ -4111,7 +3788,7 @@
           <a:bodyPr wrap="square" lIns="0" tIns="0" rIns="0" bIns="0" rtlCol="0" anchor="ctr"/>
           <a:lstStyle/>
           <a:p>
-            <a:pPr indent="0" marL="0">
+            <a:pPr marL="0" indent="0">
               <a:buNone/>
             </a:pPr>
             <a:r>
@@ -4150,7 +3827,7 @@
           <a:bodyPr wrap="square" lIns="0" tIns="0" rIns="0" bIns="0" rtlCol="0" anchor="t"/>
           <a:lstStyle/>
           <a:p>
-            <a:pPr indent="0" marL="0">
+            <a:pPr marL="0" indent="0">
               <a:buNone/>
             </a:pPr>
             <a:r>
@@ -4213,7 +3890,7 @@
           <a:bodyPr wrap="square" lIns="0" tIns="0" rIns="0" bIns="0" rtlCol="0" anchor="ctr"/>
           <a:lstStyle/>
           <a:p>
-            <a:pPr indent="0" marL="0">
+            <a:pPr marL="0" indent="0">
               <a:buNone/>
             </a:pPr>
             <a:r>
@@ -4252,7 +3929,7 @@
           <a:bodyPr wrap="square" lIns="0" tIns="0" rIns="0" bIns="0" rtlCol="0" anchor="t"/>
           <a:lstStyle/>
           <a:p>
-            <a:pPr indent="0" marL="0">
+            <a:pPr marL="0" indent="0">
               <a:buNone/>
             </a:pPr>
             <a:r>
@@ -4313,7 +3990,7 @@
           <a:bodyPr wrap="square" lIns="0" tIns="0" rIns="0" bIns="0" rtlCol="0" anchor="ctr"/>
           <a:lstStyle/>
           <a:p>
-            <a:pPr algn="ctr" indent="0" marL="0">
+            <a:pPr marL="0" indent="0" algn="ctr">
               <a:buNone/>
             </a:pPr>
             <a:r>
@@ -4327,7 +4004,7 @@
             <a:endParaRPr lang="en-US" sz="4600" dirty="0"/>
           </a:p>
           <a:p>
-            <a:pPr algn="ctr" indent="0" marL="0">
+            <a:pPr marL="0" indent="0" algn="ctr">
               <a:buNone/>
             </a:pPr>
             <a:r>
@@ -4363,7 +4040,7 @@
           <a:bodyPr wrap="square" lIns="0" tIns="0" rIns="0" bIns="0" rtlCol="0" anchor="ctr"/>
           <a:lstStyle/>
           <a:p>
-            <a:pPr algn="ctr" indent="0" marL="0">
+            <a:pPr marL="0" indent="0" algn="ctr">
               <a:buNone/>
             </a:pPr>
             <a:r>
@@ -4377,7 +4054,7 @@
             <a:endParaRPr lang="en-US" sz="1600" dirty="0"/>
           </a:p>
           <a:p>
-            <a:pPr algn="ctr" indent="0" marL="0">
+            <a:pPr marL="0" indent="0" algn="ctr">
               <a:buNone/>
             </a:pPr>
             <a:r>
@@ -4391,7 +4068,7 @@
             <a:endParaRPr lang="en-US" sz="1600" dirty="0"/>
           </a:p>
           <a:p>
-            <a:pPr algn="ctr" indent="0" marL="0">
+            <a:pPr marL="0" indent="0" algn="ctr">
               <a:buNone/>
             </a:pPr>
             <a:r>
@@ -4409,7 +4086,7 @@
       <p:sp>
         <p:nvSpPr>
           <p:cNvPr id="18" name="Text 16">
-            <a:hlinkClick r:id="rId1" tooltip=""/>
+            <a:hlinkClick r:id="rId3"/>
           </p:cNvPr>
           <p:cNvSpPr txBox="1"/>
           <p:nvPr/>
@@ -4429,24 +4106,7 @@
           <a:bodyPr wrap="square" lIns="0" tIns="0" rIns="0" bIns="0" rtlCol="0" anchor="ctr"/>
           <a:lstStyle/>
           <a:p>
-            <a:pPr algn="ctr" indent="0" marL="0">
-              <a:buNone/>
-            </a:pPr>
-            <a:r>
-              <a:rPr lang="en-US" sz="1400" u="sng" dirty="0">
-                <a:solidFill>
-                  <a:srgbClr val="F06A78"/>
-                </a:solidFill>
-                <a:hlinkClick r:id="rId1" invalidUrl="" action="" tgtFrame="" tooltip="" history="1" highlightClick="0" endSnd="0">
-                  <a:extLst>
-                    <a:ext uri="{A12FA001-AC4F-418D-AE19-62706E023703}">
-                      <ahyp:hlinkClr xmlns:ahyp="http://schemas.microsoft.com/office/drawing/2018/hyperlinkcolor" val="tx"/>
-                    </a:ext>
-                  </a:extLst>
-                </a:hlinkClick>
-              </a:rPr>
-              <a:t>github.com/USERNAME/home-credit-credit-risk</a:t>
-            </a:r>
+            <a:pPr algn="ctr"/>
             <a:endParaRPr lang="en-US" sz="1400" dirty="0"/>
           </a:p>
         </p:txBody>
@@ -4467,6 +4127,7 @@
         <a:solidFill>
           <a:srgbClr val="1F2328"/>
         </a:solidFill>
+        <a:effectLst/>
       </p:bgPr>
     </p:bg>
     <p:spTree>
@@ -4504,11 +4165,11 @@
           <a:bodyPr wrap="square" lIns="0" tIns="0" rIns="0" bIns="0" rtlCol="0" anchor="ctr"/>
           <a:lstStyle/>
           <a:p>
-            <a:pPr indent="0" marL="0">
-              <a:buNone/>
-            </a:pPr>
-            <a:r>
-              <a:rPr lang="en-US" sz="1200" b="1" spc="200" kern="0" dirty="0">
+            <a:pPr marL="0" indent="0">
+              <a:buNone/>
+            </a:pPr>
+            <a:r>
+              <a:rPr lang="en-US" sz="1200" b="1" kern="0" spc="200" dirty="0">
                 <a:solidFill>
                   <a:srgbClr val="C8102E"/>
                 </a:solidFill>
@@ -4540,7 +4201,7 @@
           <a:bodyPr wrap="square" lIns="0" tIns="0" rIns="0" bIns="0" rtlCol="0" anchor="ctr"/>
           <a:lstStyle/>
           <a:p>
-            <a:pPr indent="0" marL="0">
+            <a:pPr marL="0" indent="0">
               <a:buNone/>
             </a:pPr>
             <a:r>
@@ -4579,7 +4240,7 @@
           <a:bodyPr wrap="square" lIns="0" tIns="0" rIns="0" bIns="0" rtlCol="0" anchor="ctr"/>
           <a:lstStyle/>
           <a:p>
-            <a:pPr algn="r" indent="0" marL="0">
+            <a:pPr marL="0" indent="0" algn="r">
               <a:buNone/>
             </a:pPr>
             <a:r>
@@ -4588,18 +4249,7 @@
                   <a:srgbClr val="C8102E"/>
                 </a:solidFill>
               </a:rPr>
-              <a:t>HOME</a:t>
-            </a:r>
-            <a:pPr algn="r" indent="0" marL="0">
-              <a:buNone/>
-            </a:pPr>
-            <a:r>
-              <a:rPr lang="en-US" sz="1600" b="1" dirty="0">
-                <a:solidFill>
-                  <a:srgbClr val="C8102E"/>
-                </a:solidFill>
-              </a:rPr>
-              <a:t> CREDIT</a:t>
+              <a:t>HOME CREDIT</a:t>
             </a:r>
             <a:endParaRPr lang="en-US" sz="1600" dirty="0"/>
           </a:p>
@@ -4678,7 +4328,7 @@
           <a:bodyPr wrap="square" lIns="0" tIns="0" rIns="0" bIns="0" rtlCol="0" anchor="ctr"/>
           <a:lstStyle/>
           <a:p>
-            <a:pPr algn="ctr" indent="0" marL="0">
+            <a:pPr marL="0" indent="0" algn="ctr">
               <a:buNone/>
             </a:pPr>
             <a:r>
@@ -4714,7 +4364,7 @@
           <a:bodyPr wrap="square" lIns="0" tIns="0" rIns="0" bIns="0" rtlCol="0" anchor="ctr"/>
           <a:lstStyle/>
           <a:p>
-            <a:pPr indent="0" marL="0">
+            <a:pPr marL="0" indent="0">
               <a:buNone/>
             </a:pPr>
             <a:r>
@@ -4750,7 +4400,7 @@
           <a:bodyPr wrap="square" lIns="0" tIns="0" rIns="0" bIns="0" rtlCol="0" anchor="t"/>
           <a:lstStyle/>
           <a:p>
-            <a:pPr indent="0" marL="0">
+            <a:pPr marL="0" indent="0">
               <a:spcAft>
                 <a:spcPts val="600"/>
               </a:spcAft>
@@ -4841,7 +4491,7 @@
           <a:bodyPr wrap="square" lIns="0" tIns="0" rIns="0" bIns="0" rtlCol="0" anchor="ctr"/>
           <a:lstStyle/>
           <a:p>
-            <a:pPr algn="ctr" indent="0" marL="0">
+            <a:pPr marL="0" indent="0" algn="ctr">
               <a:buNone/>
             </a:pPr>
             <a:r>
@@ -4877,7 +4527,7 @@
           <a:bodyPr wrap="square" lIns="0" tIns="0" rIns="0" bIns="0" rtlCol="0" anchor="ctr"/>
           <a:lstStyle/>
           <a:p>
-            <a:pPr indent="0" marL="0">
+            <a:pPr marL="0" indent="0">
               <a:buNone/>
             </a:pPr>
             <a:r>
@@ -4913,7 +4563,7 @@
           <a:bodyPr wrap="square" lIns="0" tIns="0" rIns="0" bIns="0" rtlCol="0" anchor="t"/>
           <a:lstStyle/>
           <a:p>
-            <a:pPr indent="0" marL="0">
+            <a:pPr marL="0" indent="0">
               <a:spcAft>
                 <a:spcPts val="600"/>
               </a:spcAft>
@@ -5004,7 +4654,7 @@
           <a:bodyPr wrap="square" lIns="0" tIns="0" rIns="0" bIns="0" rtlCol="0" anchor="ctr"/>
           <a:lstStyle/>
           <a:p>
-            <a:pPr algn="ctr" indent="0" marL="0">
+            <a:pPr marL="0" indent="0" algn="ctr">
               <a:buNone/>
             </a:pPr>
             <a:r>
@@ -5040,7 +4690,7 @@
           <a:bodyPr wrap="square" lIns="0" tIns="0" rIns="0" bIns="0" rtlCol="0" anchor="ctr"/>
           <a:lstStyle/>
           <a:p>
-            <a:pPr indent="0" marL="0">
+            <a:pPr marL="0" indent="0">
               <a:buNone/>
             </a:pPr>
             <a:r>
@@ -5076,7 +4726,7 @@
           <a:bodyPr wrap="square" lIns="0" tIns="0" rIns="0" bIns="0" rtlCol="0" anchor="t"/>
           <a:lstStyle/>
           <a:p>
-            <a:pPr indent="0" marL="0">
+            <a:pPr marL="0" indent="0">
               <a:spcAft>
                 <a:spcPts val="600"/>
               </a:spcAft>
@@ -5167,7 +4817,7 @@
           <a:bodyPr wrap="square" lIns="0" tIns="0" rIns="0" bIns="0" rtlCol="0" anchor="ctr"/>
           <a:lstStyle/>
           <a:p>
-            <a:pPr algn="ctr" indent="0" marL="0">
+            <a:pPr marL="0" indent="0" algn="ctr">
               <a:buNone/>
             </a:pPr>
             <a:r>
@@ -5203,7 +4853,7 @@
           <a:bodyPr wrap="square" lIns="0" tIns="0" rIns="0" bIns="0" rtlCol="0" anchor="ctr"/>
           <a:lstStyle/>
           <a:p>
-            <a:pPr indent="0" marL="0">
+            <a:pPr marL="0" indent="0">
               <a:buNone/>
             </a:pPr>
             <a:r>
@@ -5239,7 +4889,7 @@
           <a:bodyPr wrap="square" lIns="0" tIns="0" rIns="0" bIns="0" rtlCol="0" anchor="t"/>
           <a:lstStyle/>
           <a:p>
-            <a:pPr indent="0" marL="0">
+            <a:pPr marL="0" indent="0">
               <a:spcAft>
                 <a:spcPts val="600"/>
               </a:spcAft>
@@ -5278,7 +4928,7 @@
           <a:bodyPr wrap="square" lIns="0" tIns="0" rIns="0" bIns="0" rtlCol="0" anchor="ctr"/>
           <a:lstStyle/>
           <a:p>
-            <a:pPr indent="0" marL="0">
+            <a:pPr marL="0" indent="0">
               <a:buNone/>
             </a:pPr>
             <a:r>
@@ -5296,14 +4946,14 @@
       <p:sp>
         <p:nvSpPr>
           <p:cNvPr id="26" name="Text 24">
-            <a:hlinkClick r:id="rId1" tooltip=""/>
+            <a:hlinkClick r:id="rId3"/>
           </p:cNvPr>
           <p:cNvSpPr txBox="1"/>
           <p:nvPr/>
         </p:nvSpPr>
         <p:spPr>
           <a:xfrm>
-            <a:off x="8183880" y="1856232"/>
+            <a:off x="8165592" y="1856232"/>
             <a:ext cx="3474720" cy="411480"/>
           </a:xfrm>
           <a:prstGeom prst="rect">
@@ -5316,23 +4966,14 @@
           <a:bodyPr wrap="square" lIns="0" tIns="0" rIns="0" bIns="0" rtlCol="0" anchor="ctr"/>
           <a:lstStyle/>
           <a:p>
-            <a:pPr indent="0" marL="0">
-              <a:buNone/>
-            </a:pPr>
             <a:r>
               <a:rPr lang="en-US" sz="1400" u="sng" dirty="0">
                 <a:solidFill>
                   <a:srgbClr val="FFFFFF"/>
                 </a:solidFill>
-                <a:hlinkClick r:id="rId1" invalidUrl="" action="" tgtFrame="" tooltip="" history="1" highlightClick="0" endSnd="0">
-                  <a:extLst>
-                    <a:ext uri="{A12FA001-AC4F-418D-AE19-62706E023703}">
-                      <ahyp:hlinkClr xmlns:ahyp="http://schemas.microsoft.com/office/drawing/2018/hyperlinkcolor" val="tx"/>
-                    </a:ext>
-                  </a:extLst>
-                </a:hlinkClick>
-              </a:rPr>
-              <a:t>github.com/USERNAME/home-credit-credit-risk</a:t>
+                <a:hlinkClick r:id="rId4"/>
+              </a:rPr>
+              <a:t>https://github.com/aoramaaulia-collab/home-credit-credit-risk.git</a:t>
             </a:r>
             <a:endParaRPr lang="en-US" sz="1400" dirty="0"/>
           </a:p>
@@ -5340,13 +4981,13 @@
       </p:sp>
       <p:sp>
         <p:nvSpPr>
-          <p:cNvPr id="27" name="Text 25"/>
-          <p:cNvSpPr txBox="1"/>
-          <p:nvPr/>
-        </p:nvSpPr>
-        <p:spPr>
-          <a:xfrm>
-            <a:off x="8183880" y="2377440"/>
+          <p:cNvPr id="29" name="Text 27"/>
+          <p:cNvSpPr txBox="1"/>
+          <p:nvPr/>
+        </p:nvSpPr>
+        <p:spPr>
+          <a:xfrm>
+            <a:off x="8165592" y="2359152"/>
             <a:ext cx="3474720" cy="347472"/>
           </a:xfrm>
           <a:prstGeom prst="rect">
@@ -5359,7 +5000,7 @@
           <a:bodyPr wrap="square" lIns="0" tIns="0" rIns="0" bIns="0" rtlCol="0" anchor="ctr"/>
           <a:lstStyle/>
           <a:p>
-            <a:pPr indent="0" marL="0">
+            <a:pPr marL="0" indent="0">
               <a:buNone/>
             </a:pPr>
             <a:r>
@@ -5368,7 +5009,7 @@
                   <a:srgbClr val="F06A78"/>
                 </a:solidFill>
               </a:rPr>
-              <a:t>Aplikasi Streamlit</a:t>
+              <a:t>Dashboard Power BI</a:t>
             </a:r>
             <a:endParaRPr lang="en-US" sz="1600" dirty="0"/>
           </a:p>
@@ -5376,13 +5017,13 @@
       </p:sp>
       <p:sp>
         <p:nvSpPr>
-          <p:cNvPr id="28" name="Text 26"/>
-          <p:cNvSpPr txBox="1"/>
-          <p:nvPr/>
-        </p:nvSpPr>
-        <p:spPr>
-          <a:xfrm>
-            <a:off x="8183880" y="2724912"/>
+          <p:cNvPr id="30" name="Text 28"/>
+          <p:cNvSpPr txBox="1"/>
+          <p:nvPr/>
+        </p:nvSpPr>
+        <p:spPr>
+          <a:xfrm>
+            <a:off x="8165592" y="2706624"/>
             <a:ext cx="3474720" cy="411480"/>
           </a:xfrm>
           <a:prstGeom prst="rect">
@@ -5395,79 +5036,7 @@
           <a:bodyPr wrap="square" lIns="0" tIns="0" rIns="0" bIns="0" rtlCol="0" anchor="ctr"/>
           <a:lstStyle/>
           <a:p>
-            <a:pPr indent="0" marL="0">
-              <a:buNone/>
-            </a:pPr>
-            <a:r>
-              <a:rPr lang="en-US" sz="1400" dirty="0">
-                <a:solidFill>
-                  <a:srgbClr val="FFFFFF"/>
-                </a:solidFill>
-              </a:rPr>
-              <a:t>link setelah deploy (share.streamlit.io)</a:t>
-            </a:r>
-            <a:endParaRPr lang="en-US" sz="1400" dirty="0"/>
-          </a:p>
-        </p:txBody>
-      </p:sp>
-      <p:sp>
-        <p:nvSpPr>
-          <p:cNvPr id="29" name="Text 27"/>
-          <p:cNvSpPr txBox="1"/>
-          <p:nvPr/>
-        </p:nvSpPr>
-        <p:spPr>
-          <a:xfrm>
-            <a:off x="8183880" y="3246120"/>
-            <a:ext cx="3474720" cy="347472"/>
-          </a:xfrm>
-          <a:prstGeom prst="rect">
-            <a:avLst/>
-          </a:prstGeom>
-          <a:noFill/>
-          <a:ln/>
-        </p:spPr>
-        <p:txBody>
-          <a:bodyPr wrap="square" lIns="0" tIns="0" rIns="0" bIns="0" rtlCol="0" anchor="ctr"/>
-          <a:lstStyle/>
-          <a:p>
-            <a:pPr indent="0" marL="0">
-              <a:buNone/>
-            </a:pPr>
-            <a:r>
-              <a:rPr lang="en-US" sz="1600" b="1" dirty="0">
-                <a:solidFill>
-                  <a:srgbClr val="F06A78"/>
-                </a:solidFill>
-              </a:rPr>
-              <a:t>Dashboard Power BI</a:t>
-            </a:r>
-            <a:endParaRPr lang="en-US" sz="1600" dirty="0"/>
-          </a:p>
-        </p:txBody>
-      </p:sp>
-      <p:sp>
-        <p:nvSpPr>
-          <p:cNvPr id="30" name="Text 28"/>
-          <p:cNvSpPr txBox="1"/>
-          <p:nvPr/>
-        </p:nvSpPr>
-        <p:spPr>
-          <a:xfrm>
-            <a:off x="8183880" y="3593592"/>
-            <a:ext cx="3474720" cy="411480"/>
-          </a:xfrm>
-          <a:prstGeom prst="rect">
-            <a:avLst/>
-          </a:prstGeom>
-          <a:noFill/>
-          <a:ln/>
-        </p:spPr>
-        <p:txBody>
-          <a:bodyPr wrap="square" lIns="0" tIns="0" rIns="0" bIns="0" rtlCol="0" anchor="ctr"/>
-          <a:lstStyle/>
-          <a:p>
-            <a:pPr indent="0" marL="0">
+            <a:pPr marL="0" indent="0">
               <a:buNone/>
             </a:pPr>
             <a:r>
@@ -5503,7 +5072,7 @@
           <a:bodyPr wrap="square" lIns="0" tIns="0" rIns="0" bIns="0" rtlCol="0" anchor="ctr"/>
           <a:lstStyle/>
           <a:p>
-            <a:pPr indent="0" marL="0">
+            <a:pPr marL="0" indent="0">
               <a:buNone/>
             </a:pPr>
             <a:r>
@@ -5633,7 +5202,7 @@
           <a:bodyPr wrap="square" lIns="0" tIns="0" rIns="0" bIns="0" rtlCol="0" anchor="ctr"/>
           <a:lstStyle/>
           <a:p>
-            <a:pPr algn="r" indent="0" marL="0">
+            <a:pPr marL="0" indent="0" algn="r">
               <a:buNone/>
             </a:pPr>
             <a:r>
@@ -5664,6 +5233,7 @@
         <a:solidFill>
           <a:srgbClr val="FFFFFF"/>
         </a:solidFill>
+        <a:effectLst/>
       </p:bgPr>
     </p:bg>
     <p:spTree>
@@ -5701,11 +5271,11 @@
           <a:bodyPr wrap="square" lIns="0" tIns="0" rIns="0" bIns="0" rtlCol="0" anchor="ctr"/>
           <a:lstStyle/>
           <a:p>
-            <a:pPr indent="0" marL="0">
-              <a:buNone/>
-            </a:pPr>
-            <a:r>
-              <a:rPr lang="en-US" sz="1200" b="1" spc="200" kern="0" dirty="0">
+            <a:pPr marL="0" indent="0">
+              <a:buNone/>
+            </a:pPr>
+            <a:r>
+              <a:rPr lang="en-US" sz="1200" b="1" kern="0" spc="200" dirty="0">
                 <a:solidFill>
                   <a:srgbClr val="C8102E"/>
                 </a:solidFill>
@@ -5737,7 +5307,7 @@
           <a:bodyPr wrap="square" lIns="0" tIns="0" rIns="0" bIns="0" rtlCol="0" anchor="ctr"/>
           <a:lstStyle/>
           <a:p>
-            <a:pPr indent="0" marL="0">
+            <a:pPr marL="0" indent="0">
               <a:buNone/>
             </a:pPr>
             <a:r>
@@ -5776,7 +5346,7 @@
           <a:bodyPr wrap="square" lIns="0" tIns="0" rIns="0" bIns="0" rtlCol="0" anchor="ctr"/>
           <a:lstStyle/>
           <a:p>
-            <a:pPr algn="r" indent="0" marL="0">
+            <a:pPr marL="0" indent="0" algn="r">
               <a:buNone/>
             </a:pPr>
             <a:r>
@@ -5785,18 +5355,7 @@
                   <a:srgbClr val="C8102E"/>
                 </a:solidFill>
               </a:rPr>
-              <a:t>HOME</a:t>
-            </a:r>
-            <a:pPr algn="r" indent="0" marL="0">
-              <a:buNone/>
-            </a:pPr>
-            <a:r>
-              <a:rPr lang="en-US" sz="1600" b="1" dirty="0">
-                <a:solidFill>
-                  <a:srgbClr val="C8102E"/>
-                </a:solidFill>
-              </a:rPr>
-              <a:t> CREDIT</a:t>
+              <a:t>HOME CREDIT</a:t>
             </a:r>
             <a:endParaRPr lang="en-US" sz="1600" dirty="0"/>
           </a:p>
@@ -5850,7 +5409,7 @@
           <a:bodyPr wrap="square" lIns="0" tIns="0" rIns="0" bIns="0" rtlCol="0" anchor="ctr"/>
           <a:lstStyle/>
           <a:p>
-            <a:pPr indent="0" marL="0">
+            <a:pPr marL="0" indent="0">
               <a:buNone/>
             </a:pPr>
             <a:r>
@@ -5889,7 +5448,7 @@
           <a:bodyPr wrap="square" lIns="0" tIns="0" rIns="0" bIns="0" rtlCol="0" anchor="t"/>
           <a:lstStyle/>
           <a:p>
-            <a:pPr indent="0" marL="0">
+            <a:pPr marL="0" indent="0">
               <a:buNone/>
             </a:pPr>
             <a:r>
@@ -5925,7 +5484,7 @@
           <a:bodyPr wrap="square" lIns="0" tIns="0" rIns="0" bIns="0" rtlCol="0" anchor="ctr"/>
           <a:lstStyle/>
           <a:p>
-            <a:pPr indent="0" marL="0">
+            <a:pPr marL="0" indent="0">
               <a:buNone/>
             </a:pPr>
             <a:r>
@@ -5964,7 +5523,7 @@
           <a:bodyPr wrap="square" lIns="0" tIns="0" rIns="0" bIns="0" rtlCol="0" anchor="t"/>
           <a:lstStyle/>
           <a:p>
-            <a:pPr indent="0" marL="0">
+            <a:pPr marL="0" indent="0">
               <a:buNone/>
             </a:pPr>
             <a:r>
@@ -6000,7 +5559,7 @@
           <a:bodyPr wrap="square" lIns="0" tIns="0" rIns="0" bIns="0" rtlCol="0" anchor="t"/>
           <a:lstStyle/>
           <a:p>
-            <a:pPr indent="0" marL="0">
+            <a:pPr marL="0" indent="0">
               <a:spcAft>
                 <a:spcPts val="600"/>
               </a:spcAft>
@@ -6064,7 +5623,7 @@
           <a:bodyPr wrap="square" lIns="0" tIns="0" rIns="0" bIns="0" rtlCol="0" anchor="ctr"/>
           <a:lstStyle/>
           <a:p>
-            <a:pPr algn="ctr" indent="0" marL="0">
+            <a:pPr marL="0" indent="0" algn="ctr">
               <a:buNone/>
             </a:pPr>
             <a:r>
@@ -6100,7 +5659,7 @@
           <a:bodyPr wrap="square" lIns="0" tIns="0" rIns="0" bIns="0" rtlCol="0" anchor="ctr"/>
           <a:lstStyle/>
           <a:p>
-            <a:pPr indent="0" marL="0">
+            <a:pPr marL="0" indent="0">
               <a:buNone/>
             </a:pPr>
             <a:r>
@@ -6136,7 +5695,7 @@
           <a:bodyPr wrap="square" lIns="0" tIns="0" rIns="0" bIns="0" rtlCol="0" anchor="t"/>
           <a:lstStyle/>
           <a:p>
-            <a:pPr indent="0" marL="0">
+            <a:pPr marL="0" indent="0">
               <a:spcAft>
                 <a:spcPts val="600"/>
               </a:spcAft>
@@ -6200,7 +5759,7 @@
           <a:bodyPr wrap="square" lIns="0" tIns="0" rIns="0" bIns="0" rtlCol="0" anchor="ctr"/>
           <a:lstStyle/>
           <a:p>
-            <a:pPr algn="ctr" indent="0" marL="0">
+            <a:pPr marL="0" indent="0" algn="ctr">
               <a:buNone/>
             </a:pPr>
             <a:r>
@@ -6236,7 +5795,7 @@
           <a:bodyPr wrap="square" lIns="0" tIns="0" rIns="0" bIns="0" rtlCol="0" anchor="ctr"/>
           <a:lstStyle/>
           <a:p>
-            <a:pPr indent="0" marL="0">
+            <a:pPr marL="0" indent="0">
               <a:buNone/>
             </a:pPr>
             <a:r>
@@ -6272,7 +5831,7 @@
           <a:bodyPr wrap="square" lIns="0" tIns="0" rIns="0" bIns="0" rtlCol="0" anchor="t"/>
           <a:lstStyle/>
           <a:p>
-            <a:pPr indent="0" marL="0">
+            <a:pPr marL="0" indent="0">
               <a:spcAft>
                 <a:spcPts val="600"/>
               </a:spcAft>
@@ -6336,7 +5895,7 @@
           <a:bodyPr wrap="square" lIns="0" tIns="0" rIns="0" bIns="0" rtlCol="0" anchor="ctr"/>
           <a:lstStyle/>
           <a:p>
-            <a:pPr algn="ctr" indent="0" marL="0">
+            <a:pPr marL="0" indent="0" algn="ctr">
               <a:buNone/>
             </a:pPr>
             <a:r>
@@ -6372,7 +5931,7 @@
           <a:bodyPr wrap="square" lIns="0" tIns="0" rIns="0" bIns="0" rtlCol="0" anchor="ctr"/>
           <a:lstStyle/>
           <a:p>
-            <a:pPr indent="0" marL="0">
+            <a:pPr marL="0" indent="0">
               <a:buNone/>
             </a:pPr>
             <a:r>
@@ -6408,7 +5967,7 @@
           <a:bodyPr wrap="square" lIns="0" tIns="0" rIns="0" bIns="0" rtlCol="0" anchor="t"/>
           <a:lstStyle/>
           <a:p>
-            <a:pPr indent="0" marL="0">
+            <a:pPr marL="0" indent="0">
               <a:spcAft>
                 <a:spcPts val="600"/>
               </a:spcAft>
@@ -6472,7 +6031,7 @@
           <a:bodyPr wrap="square" lIns="0" tIns="0" rIns="0" bIns="0" rtlCol="0" anchor="ctr"/>
           <a:lstStyle/>
           <a:p>
-            <a:pPr algn="ctr" indent="0" marL="0">
+            <a:pPr marL="0" indent="0" algn="ctr">
               <a:buNone/>
             </a:pPr>
             <a:r>
@@ -6508,7 +6067,7 @@
           <a:bodyPr wrap="square" lIns="0" tIns="0" rIns="0" bIns="0" rtlCol="0" anchor="ctr"/>
           <a:lstStyle/>
           <a:p>
-            <a:pPr indent="0" marL="0">
+            <a:pPr marL="0" indent="0">
               <a:buNone/>
             </a:pPr>
             <a:r>
@@ -6544,7 +6103,7 @@
           <a:bodyPr wrap="square" lIns="0" tIns="0" rIns="0" bIns="0" rtlCol="0" anchor="t"/>
           <a:lstStyle/>
           <a:p>
-            <a:pPr indent="0" marL="0">
+            <a:pPr marL="0" indent="0">
               <a:spcAft>
                 <a:spcPts val="600"/>
               </a:spcAft>
@@ -6583,7 +6142,7 @@
           <a:bodyPr wrap="square" lIns="0" tIns="0" rIns="0" bIns="0" rtlCol="0" anchor="ctr"/>
           <a:lstStyle/>
           <a:p>
-            <a:pPr algn="r" indent="0" marL="0">
+            <a:pPr marL="0" indent="0" algn="r">
               <a:buNone/>
             </a:pPr>
             <a:r>
@@ -6614,6 +6173,7 @@
         <a:solidFill>
           <a:srgbClr val="FFFFFF"/>
         </a:solidFill>
+        <a:effectLst/>
       </p:bgPr>
     </p:bg>
     <p:spTree>
@@ -6651,11 +6211,11 @@
           <a:bodyPr wrap="square" lIns="0" tIns="0" rIns="0" bIns="0" rtlCol="0" anchor="ctr"/>
           <a:lstStyle/>
           <a:p>
-            <a:pPr indent="0" marL="0">
-              <a:buNone/>
-            </a:pPr>
-            <a:r>
-              <a:rPr lang="en-US" sz="1200" b="1" spc="200" kern="0" dirty="0">
+            <a:pPr marL="0" indent="0">
+              <a:buNone/>
+            </a:pPr>
+            <a:r>
+              <a:rPr lang="en-US" sz="1200" b="1" kern="0" spc="200" dirty="0">
                 <a:solidFill>
                   <a:srgbClr val="C8102E"/>
                 </a:solidFill>
@@ -6687,7 +6247,7 @@
           <a:bodyPr wrap="square" lIns="0" tIns="0" rIns="0" bIns="0" rtlCol="0" anchor="ctr"/>
           <a:lstStyle/>
           <a:p>
-            <a:pPr indent="0" marL="0">
+            <a:pPr marL="0" indent="0">
               <a:buNone/>
             </a:pPr>
             <a:r>
@@ -6726,7 +6286,7 @@
           <a:bodyPr wrap="square" lIns="0" tIns="0" rIns="0" bIns="0" rtlCol="0" anchor="ctr"/>
           <a:lstStyle/>
           <a:p>
-            <a:pPr algn="r" indent="0" marL="0">
+            <a:pPr marL="0" indent="0" algn="r">
               <a:buNone/>
             </a:pPr>
             <a:r>
@@ -6735,18 +6295,7 @@
                   <a:srgbClr val="C8102E"/>
                 </a:solidFill>
               </a:rPr>
-              <a:t>HOME</a:t>
-            </a:r>
-            <a:pPr algn="r" indent="0" marL="0">
-              <a:buNone/>
-            </a:pPr>
-            <a:r>
-              <a:rPr lang="en-US" sz="1600" b="1" dirty="0">
-                <a:solidFill>
-                  <a:srgbClr val="C8102E"/>
-                </a:solidFill>
-              </a:rPr>
-              <a:t> CREDIT</a:t>
+              <a:t>HOME CREDIT</a:t>
             </a:r>
             <a:endParaRPr lang="en-US" sz="1600" dirty="0"/>
           </a:p>
@@ -6800,7 +6349,7 @@
           <a:bodyPr wrap="square" lIns="0" tIns="0" rIns="0" bIns="0" rtlCol="0" anchor="ctr"/>
           <a:lstStyle/>
           <a:p>
-            <a:pPr indent="0" marL="0">
+            <a:pPr marL="0" indent="0">
               <a:buNone/>
             </a:pPr>
             <a:r>
@@ -6839,7 +6388,7 @@
           <a:bodyPr wrap="square" lIns="0" tIns="0" rIns="0" bIns="0" rtlCol="0" anchor="t"/>
           <a:lstStyle/>
           <a:p>
-            <a:pPr indent="0" marL="0">
+            <a:pPr marL="0" indent="0">
               <a:buNone/>
             </a:pPr>
             <a:r>
@@ -6902,7 +6451,7 @@
           <a:bodyPr wrap="square" lIns="0" tIns="0" rIns="0" bIns="0" rtlCol="0" anchor="ctr"/>
           <a:lstStyle/>
           <a:p>
-            <a:pPr indent="0" marL="0">
+            <a:pPr marL="0" indent="0">
               <a:buNone/>
             </a:pPr>
             <a:r>
@@ -6941,7 +6490,7 @@
           <a:bodyPr wrap="square" lIns="0" tIns="0" rIns="0" bIns="0" rtlCol="0" anchor="t"/>
           <a:lstStyle/>
           <a:p>
-            <a:pPr indent="0" marL="0">
+            <a:pPr marL="0" indent="0">
               <a:buNone/>
             </a:pPr>
             <a:r>
@@ -7004,7 +6553,7 @@
           <a:bodyPr wrap="square" lIns="0" tIns="0" rIns="0" bIns="0" rtlCol="0" anchor="ctr"/>
           <a:lstStyle/>
           <a:p>
-            <a:pPr indent="0" marL="0">
+            <a:pPr marL="0" indent="0">
               <a:buNone/>
             </a:pPr>
             <a:r>
@@ -7043,7 +6592,7 @@
           <a:bodyPr wrap="square" lIns="0" tIns="0" rIns="0" bIns="0" rtlCol="0" anchor="t"/>
           <a:lstStyle/>
           <a:p>
-            <a:pPr indent="0" marL="0">
+            <a:pPr marL="0" indent="0">
               <a:buNone/>
             </a:pPr>
             <a:r>
@@ -7106,7 +6655,7 @@
           <a:bodyPr wrap="square" lIns="0" tIns="0" rIns="0" bIns="0" rtlCol="0" anchor="ctr"/>
           <a:lstStyle/>
           <a:p>
-            <a:pPr indent="0" marL="0">
+            <a:pPr marL="0" indent="0">
               <a:buNone/>
             </a:pPr>
             <a:r>
@@ -7145,7 +6694,7 @@
           <a:bodyPr wrap="square" lIns="0" tIns="0" rIns="0" bIns="0" rtlCol="0" anchor="t"/>
           <a:lstStyle/>
           <a:p>
-            <a:pPr indent="0" marL="0">
+            <a:pPr marL="0" indent="0">
               <a:buNone/>
             </a:pPr>
             <a:r>
@@ -7208,7 +6757,7 @@
           <a:bodyPr wrap="square" lIns="0" tIns="0" rIns="0" bIns="0" rtlCol="0" anchor="ctr"/>
           <a:lstStyle/>
           <a:p>
-            <a:pPr algn="ctr" indent="0" marL="0">
+            <a:pPr marL="0" indent="0" algn="ctr">
               <a:buNone/>
             </a:pPr>
             <a:r>
@@ -7222,7 +6771,7 @@
             <a:endParaRPr lang="en-US" sz="1700" dirty="0"/>
           </a:p>
           <a:p>
-            <a:pPr algn="ctr" indent="0" marL="0">
+            <a:pPr marL="0" indent="0" algn="ctr">
               <a:buNone/>
             </a:pPr>
             <a:r>
@@ -7258,7 +6807,7 @@
           <a:bodyPr wrap="square" lIns="0" tIns="0" rIns="0" bIns="0" rtlCol="0" anchor="ctr"/>
           <a:lstStyle/>
           <a:p>
-            <a:pPr algn="ctr" indent="0" marL="0">
+            <a:pPr marL="0" indent="0" algn="ctr">
               <a:buNone/>
             </a:pPr>
             <a:r>
@@ -7321,7 +6870,7 @@
           <a:bodyPr wrap="square" lIns="0" tIns="0" rIns="0" bIns="0" rtlCol="0" anchor="ctr"/>
           <a:lstStyle/>
           <a:p>
-            <a:pPr algn="ctr" indent="0" marL="0">
+            <a:pPr marL="0" indent="0" algn="ctr">
               <a:buNone/>
             </a:pPr>
             <a:r>
@@ -7335,7 +6884,7 @@
             <a:endParaRPr lang="en-US" sz="1700" dirty="0"/>
           </a:p>
           <a:p>
-            <a:pPr algn="ctr" indent="0" marL="0">
+            <a:pPr marL="0" indent="0" algn="ctr">
               <a:buNone/>
             </a:pPr>
             <a:r>
@@ -7371,7 +6920,7 @@
           <a:bodyPr wrap="square" lIns="0" tIns="0" rIns="0" bIns="0" rtlCol="0" anchor="ctr"/>
           <a:lstStyle/>
           <a:p>
-            <a:pPr algn="ctr" indent="0" marL="0">
+            <a:pPr marL="0" indent="0" algn="ctr">
               <a:buNone/>
             </a:pPr>
             <a:r>
@@ -7434,7 +6983,7 @@
           <a:bodyPr wrap="square" lIns="0" tIns="0" rIns="0" bIns="0" rtlCol="0" anchor="ctr"/>
           <a:lstStyle/>
           <a:p>
-            <a:pPr algn="ctr" indent="0" marL="0">
+            <a:pPr marL="0" indent="0" algn="ctr">
               <a:buNone/>
             </a:pPr>
             <a:r>
@@ -7448,7 +6997,7 @@
             <a:endParaRPr lang="en-US" sz="1700" dirty="0"/>
           </a:p>
           <a:p>
-            <a:pPr algn="ctr" indent="0" marL="0">
+            <a:pPr marL="0" indent="0" algn="ctr">
               <a:buNone/>
             </a:pPr>
             <a:r>
@@ -7484,7 +7033,7 @@
           <a:bodyPr wrap="square" lIns="0" tIns="0" rIns="0" bIns="0" rtlCol="0" anchor="ctr"/>
           <a:lstStyle/>
           <a:p>
-            <a:pPr algn="ctr" indent="0" marL="0">
+            <a:pPr marL="0" indent="0" algn="ctr">
               <a:buNone/>
             </a:pPr>
             <a:r>
@@ -7547,7 +7096,7 @@
           <a:bodyPr wrap="square" lIns="0" tIns="0" rIns="0" bIns="0" rtlCol="0" anchor="ctr"/>
           <a:lstStyle/>
           <a:p>
-            <a:pPr algn="ctr" indent="0" marL="0">
+            <a:pPr marL="0" indent="0" algn="ctr">
               <a:buNone/>
             </a:pPr>
             <a:r>
@@ -7561,7 +7110,7 @@
             <a:endParaRPr lang="en-US" sz="1700" dirty="0"/>
           </a:p>
           <a:p>
-            <a:pPr algn="ctr" indent="0" marL="0">
+            <a:pPr marL="0" indent="0" algn="ctr">
               <a:buNone/>
             </a:pPr>
             <a:r>
@@ -7597,7 +7146,7 @@
           <a:bodyPr wrap="square" lIns="0" tIns="0" rIns="0" bIns="0" rtlCol="0" anchor="ctr"/>
           <a:lstStyle/>
           <a:p>
-            <a:pPr algn="ctr" indent="0" marL="0">
+            <a:pPr marL="0" indent="0" algn="ctr">
               <a:buNone/>
             </a:pPr>
             <a:r>
@@ -7660,7 +7209,7 @@
           <a:bodyPr wrap="square" lIns="0" tIns="0" rIns="0" bIns="0" rtlCol="0" anchor="ctr"/>
           <a:lstStyle/>
           <a:p>
-            <a:pPr algn="ctr" indent="0" marL="0">
+            <a:pPr marL="0" indent="0" algn="ctr">
               <a:buNone/>
             </a:pPr>
             <a:r>
@@ -7674,7 +7223,7 @@
             <a:endParaRPr lang="en-US" sz="1700" dirty="0"/>
           </a:p>
           <a:p>
-            <a:pPr algn="ctr" indent="0" marL="0">
+            <a:pPr marL="0" indent="0" algn="ctr">
               <a:buNone/>
             </a:pPr>
             <a:r>
@@ -7710,7 +7259,7 @@
           <a:bodyPr wrap="square" lIns="0" tIns="0" rIns="0" bIns="0" rtlCol="0" anchor="t"/>
           <a:lstStyle/>
           <a:p>
-            <a:pPr indent="0" marL="0">
+            <a:pPr marL="0" indent="0">
               <a:spcAft>
                 <a:spcPts val="1000"/>
               </a:spcAft>
@@ -7724,30 +7273,24 @@
               </a:rPr>
               <a:t>Apa isi riwayatnya: </a:t>
             </a:r>
-            <a:pPr indent="0" marL="0">
+            <a:r>
+              <a:rPr lang="en-US" sz="1600" dirty="0">
+                <a:solidFill>
+                  <a:srgbClr val="6B7280"/>
+                </a:solidFill>
+              </a:rPr>
+              <a:t>pinjaman di lembaga lain (bureau), pengajuan sebelumnya di Home Credit, catatan pembayaran cicilan, pinjaman barang (POS), dan kartu kredit.</a:t>
+            </a:r>
+            <a:endParaRPr lang="en-US" sz="1600" dirty="0"/>
+          </a:p>
+          <a:p>
+            <a:pPr marL="0" indent="0">
               <a:spcAft>
                 <a:spcPts val="1000"/>
               </a:spcAft>
               <a:buNone/>
             </a:pPr>
             <a:r>
-              <a:rPr lang="en-US" sz="1600" dirty="0">
-                <a:solidFill>
-                  <a:srgbClr val="6B7280"/>
-                </a:solidFill>
-              </a:rPr>
-              <a:t>pinjaman di lembaga lain (bureau), pengajuan sebelumnya di Home Credit, catatan pembayaran cicilan, pinjaman barang (POS), dan kartu kredit.</a:t>
-            </a:r>
-            <a:endParaRPr lang="en-US" sz="1600" dirty="0"/>
-          </a:p>
-          <a:p>
-            <a:pPr indent="0" marL="0">
-              <a:spcAft>
-                <a:spcPts val="1000"/>
-              </a:spcAft>
-              <a:buNone/>
-            </a:pPr>
-            <a:r>
               <a:rPr lang="en-US" sz="1600" b="1" dirty="0">
                 <a:solidFill>
                   <a:srgbClr val="2B3036"/>
@@ -7755,12 +7298,6 @@
               </a:rPr>
               <a:t>Kenapa diringkas dengan SQL: </a:t>
             </a:r>
-            <a:pPr indent="0" marL="0">
-              <a:spcAft>
-                <a:spcPts val="1000"/>
-              </a:spcAft>
-              <a:buNone/>
-            </a:pPr>
             <a:r>
               <a:rPr lang="en-US" sz="1600" dirty="0">
                 <a:solidFill>
@@ -7794,7 +7331,7 @@
           <a:bodyPr wrap="square" lIns="0" tIns="0" rIns="0" bIns="0" rtlCol="0" anchor="ctr"/>
           <a:lstStyle/>
           <a:p>
-            <a:pPr algn="r" indent="0" marL="0">
+            <a:pPr marL="0" indent="0" algn="r">
               <a:buNone/>
             </a:pPr>
             <a:r>
@@ -7825,6 +7362,7 @@
         <a:solidFill>
           <a:srgbClr val="FFFFFF"/>
         </a:solidFill>
+        <a:effectLst/>
       </p:bgPr>
     </p:bg>
     <p:spTree>
@@ -7862,11 +7400,11 @@
           <a:bodyPr wrap="square" lIns="0" tIns="0" rIns="0" bIns="0" rtlCol="0" anchor="ctr"/>
           <a:lstStyle/>
           <a:p>
-            <a:pPr indent="0" marL="0">
-              <a:buNone/>
-            </a:pPr>
-            <a:r>
-              <a:rPr lang="en-US" sz="1200" b="1" spc="200" kern="0" dirty="0">
+            <a:pPr marL="0" indent="0">
+              <a:buNone/>
+            </a:pPr>
+            <a:r>
+              <a:rPr lang="en-US" sz="1200" b="1" kern="0" spc="200" dirty="0">
                 <a:solidFill>
                   <a:srgbClr val="C8102E"/>
                 </a:solidFill>
@@ -7898,7 +7436,7 @@
           <a:bodyPr wrap="square" lIns="0" tIns="0" rIns="0" bIns="0" rtlCol="0" anchor="ctr"/>
           <a:lstStyle/>
           <a:p>
-            <a:pPr indent="0" marL="0">
+            <a:pPr marL="0" indent="0">
               <a:buNone/>
             </a:pPr>
             <a:r>
@@ -7937,7 +7475,7 @@
           <a:bodyPr wrap="square" lIns="0" tIns="0" rIns="0" bIns="0" rtlCol="0" anchor="ctr"/>
           <a:lstStyle/>
           <a:p>
-            <a:pPr algn="r" indent="0" marL="0">
+            <a:pPr marL="0" indent="0" algn="r">
               <a:buNone/>
             </a:pPr>
             <a:r>
@@ -7946,18 +7484,7 @@
                   <a:srgbClr val="C8102E"/>
                 </a:solidFill>
               </a:rPr>
-              <a:t>HOME</a:t>
-            </a:r>
-            <a:pPr algn="r" indent="0" marL="0">
-              <a:buNone/>
-            </a:pPr>
-            <a:r>
-              <a:rPr lang="en-US" sz="1600" b="1" dirty="0">
-                <a:solidFill>
-                  <a:srgbClr val="C8102E"/>
-                </a:solidFill>
-              </a:rPr>
-              <a:t> CREDIT</a:t>
+              <a:t>HOME CREDIT</a:t>
             </a:r>
             <a:endParaRPr lang="en-US" sz="1600" dirty="0"/>
           </a:p>
@@ -8036,7 +7563,7 @@
           <a:bodyPr wrap="square" lIns="0" tIns="0" rIns="0" bIns="0" rtlCol="0" anchor="ctr"/>
           <a:lstStyle/>
           <a:p>
-            <a:pPr algn="ctr" indent="0" marL="0">
+            <a:pPr marL="0" indent="0" algn="ctr">
               <a:buNone/>
             </a:pPr>
             <a:r>
@@ -8072,7 +7599,7 @@
           <a:bodyPr wrap="square" lIns="0" tIns="0" rIns="0" bIns="0" rtlCol="0" anchor="ctr"/>
           <a:lstStyle/>
           <a:p>
-            <a:pPr indent="0" marL="0">
+            <a:pPr marL="0" indent="0">
               <a:buNone/>
             </a:pPr>
             <a:r>
@@ -8108,7 +7635,7 @@
           <a:bodyPr wrap="square" lIns="0" tIns="0" rIns="0" bIns="0" rtlCol="0" anchor="t"/>
           <a:lstStyle/>
           <a:p>
-            <a:pPr indent="0" marL="0">
+            <a:pPr marL="0" indent="0">
               <a:spcAft>
                 <a:spcPts val="600"/>
               </a:spcAft>
@@ -8199,7 +7726,7 @@
           <a:bodyPr wrap="square" lIns="0" tIns="0" rIns="0" bIns="0" rtlCol="0" anchor="ctr"/>
           <a:lstStyle/>
           <a:p>
-            <a:pPr algn="ctr" indent="0" marL="0">
+            <a:pPr marL="0" indent="0" algn="ctr">
               <a:buNone/>
             </a:pPr>
             <a:r>
@@ -8235,7 +7762,7 @@
           <a:bodyPr wrap="square" lIns="0" tIns="0" rIns="0" bIns="0" rtlCol="0" anchor="ctr"/>
           <a:lstStyle/>
           <a:p>
-            <a:pPr indent="0" marL="0">
+            <a:pPr marL="0" indent="0">
               <a:buNone/>
             </a:pPr>
             <a:r>
@@ -8271,7 +7798,7 @@
           <a:bodyPr wrap="square" lIns="0" tIns="0" rIns="0" bIns="0" rtlCol="0" anchor="t"/>
           <a:lstStyle/>
           <a:p>
-            <a:pPr indent="0" marL="0">
+            <a:pPr marL="0" indent="0">
               <a:spcAft>
                 <a:spcPts val="600"/>
               </a:spcAft>
@@ -8362,7 +7889,7 @@
           <a:bodyPr wrap="square" lIns="0" tIns="0" rIns="0" bIns="0" rtlCol="0" anchor="ctr"/>
           <a:lstStyle/>
           <a:p>
-            <a:pPr algn="ctr" indent="0" marL="0">
+            <a:pPr marL="0" indent="0" algn="ctr">
               <a:buNone/>
             </a:pPr>
             <a:r>
@@ -8398,7 +7925,7 @@
           <a:bodyPr wrap="square" lIns="0" tIns="0" rIns="0" bIns="0" rtlCol="0" anchor="ctr"/>
           <a:lstStyle/>
           <a:p>
-            <a:pPr indent="0" marL="0">
+            <a:pPr marL="0" indent="0">
               <a:buNone/>
             </a:pPr>
             <a:r>
@@ -8434,7 +7961,7 @@
           <a:bodyPr wrap="square" lIns="0" tIns="0" rIns="0" bIns="0" rtlCol="0" anchor="t"/>
           <a:lstStyle/>
           <a:p>
-            <a:pPr indent="0" marL="0">
+            <a:pPr marL="0" indent="0">
               <a:spcAft>
                 <a:spcPts val="600"/>
               </a:spcAft>
@@ -8525,7 +8052,7 @@
           <a:bodyPr wrap="square" lIns="0" tIns="0" rIns="0" bIns="0" rtlCol="0" anchor="ctr"/>
           <a:lstStyle/>
           <a:p>
-            <a:pPr algn="ctr" indent="0" marL="0">
+            <a:pPr marL="0" indent="0" algn="ctr">
               <a:buNone/>
             </a:pPr>
             <a:r>
@@ -8561,7 +8088,7 @@
           <a:bodyPr wrap="square" lIns="0" tIns="0" rIns="0" bIns="0" rtlCol="0" anchor="ctr"/>
           <a:lstStyle/>
           <a:p>
-            <a:pPr indent="0" marL="0">
+            <a:pPr marL="0" indent="0">
               <a:buNone/>
             </a:pPr>
             <a:r>
@@ -8597,7 +8124,7 @@
           <a:bodyPr wrap="square" lIns="0" tIns="0" rIns="0" bIns="0" rtlCol="0" anchor="t"/>
           <a:lstStyle/>
           <a:p>
-            <a:pPr indent="0" marL="0">
+            <a:pPr marL="0" indent="0">
               <a:spcAft>
                 <a:spcPts val="600"/>
               </a:spcAft>
@@ -8688,7 +8215,7 @@
           <a:bodyPr wrap="square" lIns="0" tIns="0" rIns="0" bIns="0" rtlCol="0" anchor="ctr"/>
           <a:lstStyle/>
           <a:p>
-            <a:pPr algn="ctr" indent="0" marL="0">
+            <a:pPr marL="0" indent="0" algn="ctr">
               <a:buNone/>
             </a:pPr>
             <a:r>
@@ -8724,7 +8251,7 @@
           <a:bodyPr wrap="square" lIns="0" tIns="0" rIns="0" bIns="0" rtlCol="0" anchor="ctr"/>
           <a:lstStyle/>
           <a:p>
-            <a:pPr indent="0" marL="0">
+            <a:pPr marL="0" indent="0">
               <a:buNone/>
             </a:pPr>
             <a:r>
@@ -8760,7 +8287,7 @@
           <a:bodyPr wrap="square" lIns="0" tIns="0" rIns="0" bIns="0" rtlCol="0" anchor="t"/>
           <a:lstStyle/>
           <a:p>
-            <a:pPr indent="0" marL="0">
+            <a:pPr marL="0" indent="0">
               <a:spcAft>
                 <a:spcPts val="600"/>
               </a:spcAft>
@@ -8851,7 +8378,7 @@
           <a:bodyPr wrap="square" lIns="0" tIns="0" rIns="0" bIns="0" rtlCol="0" anchor="ctr"/>
           <a:lstStyle/>
           <a:p>
-            <a:pPr algn="ctr" indent="0" marL="0">
+            <a:pPr marL="0" indent="0" algn="ctr">
               <a:buNone/>
             </a:pPr>
             <a:r>
@@ -8887,7 +8414,7 @@
           <a:bodyPr wrap="square" lIns="0" tIns="0" rIns="0" bIns="0" rtlCol="0" anchor="ctr"/>
           <a:lstStyle/>
           <a:p>
-            <a:pPr indent="0" marL="0">
+            <a:pPr marL="0" indent="0">
               <a:buNone/>
             </a:pPr>
             <a:r>
@@ -8923,7 +8450,7 @@
           <a:bodyPr wrap="square" lIns="0" tIns="0" rIns="0" bIns="0" rtlCol="0" anchor="t"/>
           <a:lstStyle/>
           <a:p>
-            <a:pPr indent="0" marL="0">
+            <a:pPr marL="0" indent="0">
               <a:spcAft>
                 <a:spcPts val="600"/>
               </a:spcAft>
@@ -8962,7 +8489,7 @@
           <a:bodyPr wrap="square" lIns="0" tIns="0" rIns="0" bIns="0" rtlCol="0" anchor="ctr"/>
           <a:lstStyle/>
           <a:p>
-            <a:pPr algn="r" indent="0" marL="0">
+            <a:pPr marL="0" indent="0" algn="r">
               <a:buNone/>
             </a:pPr>
             <a:r>
@@ -8993,6 +8520,7 @@
         <a:solidFill>
           <a:srgbClr val="FFFFFF"/>
         </a:solidFill>
+        <a:effectLst/>
       </p:bgPr>
     </p:bg>
     <p:spTree>
@@ -9030,11 +8558,11 @@
           <a:bodyPr wrap="square" lIns="0" tIns="0" rIns="0" bIns="0" rtlCol="0" anchor="ctr"/>
           <a:lstStyle/>
           <a:p>
-            <a:pPr indent="0" marL="0">
-              <a:buNone/>
-            </a:pPr>
-            <a:r>
-              <a:rPr lang="en-US" sz="1200" b="1" spc="200" kern="0" dirty="0">
+            <a:pPr marL="0" indent="0">
+              <a:buNone/>
+            </a:pPr>
+            <a:r>
+              <a:rPr lang="en-US" sz="1200" b="1" kern="0" spc="200" dirty="0">
                 <a:solidFill>
                   <a:srgbClr val="C8102E"/>
                 </a:solidFill>
@@ -9066,7 +8594,7 @@
           <a:bodyPr wrap="square" lIns="0" tIns="0" rIns="0" bIns="0" rtlCol="0" anchor="ctr"/>
           <a:lstStyle/>
           <a:p>
-            <a:pPr indent="0" marL="0">
+            <a:pPr marL="0" indent="0">
               <a:buNone/>
             </a:pPr>
             <a:r>
@@ -9105,7 +8633,7 @@
           <a:bodyPr wrap="square" lIns="0" tIns="0" rIns="0" bIns="0" rtlCol="0" anchor="ctr"/>
           <a:lstStyle/>
           <a:p>
-            <a:pPr algn="r" indent="0" marL="0">
+            <a:pPr marL="0" indent="0" algn="r">
               <a:buNone/>
             </a:pPr>
             <a:r>
@@ -9114,18 +8642,7 @@
                   <a:srgbClr val="C8102E"/>
                 </a:solidFill>
               </a:rPr>
-              <a:t>HOME</a:t>
-            </a:r>
-            <a:pPr algn="r" indent="0" marL="0">
-              <a:buNone/>
-            </a:pPr>
-            <a:r>
-              <a:rPr lang="en-US" sz="1600" b="1" dirty="0">
-                <a:solidFill>
-                  <a:srgbClr val="C8102E"/>
-                </a:solidFill>
-              </a:rPr>
-              <a:t> CREDIT</a:t>
+              <a:t>HOME CREDIT</a:t>
             </a:r>
             <a:endParaRPr lang="en-US" sz="1600" dirty="0"/>
           </a:p>
@@ -9133,7 +8650,7 @@
       </p:sp>
       <p:graphicFrame>
         <p:nvGraphicFramePr>
-          <p:cNvPr id="5" name="Chart 0" descr=""/>
+          <p:cNvPr id="5" name="Chart 0"/>
           <p:cNvGraphicFramePr/>
           <p:nvPr/>
         </p:nvGraphicFramePr>
@@ -9141,9 +8658,9 @@
           <a:off x="548640" y="1508760"/>
           <a:ext cx="6766560" cy="4343400"/>
         </p:xfrm>
-        <a:graphic xmlns:a="http://schemas.openxmlformats.org/drawingml/2006/main">
+        <a:graphic>
           <a:graphicData uri="http://schemas.openxmlformats.org/drawingml/2006/chart">
-            <c:chart xmlns:c="http://schemas.openxmlformats.org/drawingml/2006/chart" r:id="rId1"/>
+            <c:chart xmlns:c="http://schemas.openxmlformats.org/drawingml/2006/chart" xmlns:r="http://schemas.openxmlformats.org/officeDocument/2006/relationships" r:id="rId3"/>
           </a:graphicData>
         </a:graphic>
       </p:graphicFrame>
@@ -9168,7 +8685,7 @@
           <a:bodyPr wrap="square" lIns="0" tIns="0" rIns="0" bIns="0" rtlCol="0" anchor="t"/>
           <a:lstStyle/>
           <a:p>
-            <a:pPr indent="0" marL="0">
+            <a:pPr marL="0" indent="0">
               <a:spcAft>
                 <a:spcPts val="600"/>
               </a:spcAft>
@@ -9234,7 +8751,7 @@
           <a:bodyPr wrap="square" lIns="0" tIns="0" rIns="0" bIns="0" rtlCol="0" anchor="ctr"/>
           <a:lstStyle/>
           <a:p>
-            <a:pPr indent="0" marL="0">
+            <a:pPr marL="0" indent="0">
               <a:buNone/>
             </a:pPr>
             <a:r>
@@ -9273,7 +8790,7 @@
           <a:bodyPr wrap="square" lIns="0" tIns="0" rIns="0" bIns="0" rtlCol="0" anchor="t"/>
           <a:lstStyle/>
           <a:p>
-            <a:pPr indent="0" marL="0">
+            <a:pPr marL="0" indent="0">
               <a:buNone/>
             </a:pPr>
             <a:r>
@@ -9309,7 +8826,7 @@
           <a:bodyPr wrap="square" lIns="0" tIns="0" rIns="0" bIns="0" rtlCol="0" anchor="ctr"/>
           <a:lstStyle/>
           <a:p>
-            <a:pPr indent="0" marL="0">
+            <a:pPr marL="0" indent="0">
               <a:buNone/>
             </a:pPr>
             <a:r>
@@ -9421,7 +8938,7 @@
           <a:bodyPr wrap="square" lIns="0" tIns="0" rIns="0" bIns="0" rtlCol="0" anchor="ctr"/>
           <a:lstStyle/>
           <a:p>
-            <a:pPr algn="r" indent="0" marL="0">
+            <a:pPr marL="0" indent="0" algn="r">
               <a:buNone/>
             </a:pPr>
             <a:r>
@@ -9452,6 +8969,7 @@
         <a:solidFill>
           <a:srgbClr val="FFFFFF"/>
         </a:solidFill>
+        <a:effectLst/>
       </p:bgPr>
     </p:bg>
     <p:spTree>
@@ -9489,11 +9007,11 @@
           <a:bodyPr wrap="square" lIns="0" tIns="0" rIns="0" bIns="0" rtlCol="0" anchor="ctr"/>
           <a:lstStyle/>
           <a:p>
-            <a:pPr indent="0" marL="0">
-              <a:buNone/>
-            </a:pPr>
-            <a:r>
-              <a:rPr lang="en-US" sz="1200" b="1" spc="200" kern="0" dirty="0">
+            <a:pPr marL="0" indent="0">
+              <a:buNone/>
+            </a:pPr>
+            <a:r>
+              <a:rPr lang="en-US" sz="1200" b="1" kern="0" spc="200" dirty="0">
                 <a:solidFill>
                   <a:srgbClr val="C8102E"/>
                 </a:solidFill>
@@ -9525,7 +9043,7 @@
           <a:bodyPr wrap="square" lIns="0" tIns="0" rIns="0" bIns="0" rtlCol="0" anchor="ctr"/>
           <a:lstStyle/>
           <a:p>
-            <a:pPr indent="0" marL="0">
+            <a:pPr marL="0" indent="0">
               <a:buNone/>
             </a:pPr>
             <a:r>
@@ -9564,7 +9082,7 @@
           <a:bodyPr wrap="square" lIns="0" tIns="0" rIns="0" bIns="0" rtlCol="0" anchor="ctr"/>
           <a:lstStyle/>
           <a:p>
-            <a:pPr algn="r" indent="0" marL="0">
+            <a:pPr marL="0" indent="0" algn="r">
               <a:buNone/>
             </a:pPr>
             <a:r>
@@ -9573,18 +9091,7 @@
                   <a:srgbClr val="C8102E"/>
                 </a:solidFill>
               </a:rPr>
-              <a:t>HOME</a:t>
-            </a:r>
-            <a:pPr algn="r" indent="0" marL="0">
-              <a:buNone/>
-            </a:pPr>
-            <a:r>
-              <a:rPr lang="en-US" sz="1600" b="1" dirty="0">
-                <a:solidFill>
-                  <a:srgbClr val="C8102E"/>
-                </a:solidFill>
-              </a:rPr>
-              <a:t> CREDIT</a:t>
+              <a:t>HOME CREDIT</a:t>
             </a:r>
             <a:endParaRPr lang="en-US" sz="1600" dirty="0"/>
           </a:p>
@@ -9592,7 +9099,7 @@
       </p:sp>
       <p:graphicFrame>
         <p:nvGraphicFramePr>
-          <p:cNvPr id="5" name="Chart 0" descr=""/>
+          <p:cNvPr id="5" name="Chart 0"/>
           <p:cNvGraphicFramePr/>
           <p:nvPr/>
         </p:nvGraphicFramePr>
@@ -9600,15 +9107,15 @@
           <a:off x="548640" y="1508760"/>
           <a:ext cx="5440680" cy="3703320"/>
         </p:xfrm>
-        <a:graphic xmlns:a="http://schemas.openxmlformats.org/drawingml/2006/main">
+        <a:graphic>
           <a:graphicData uri="http://schemas.openxmlformats.org/drawingml/2006/chart">
-            <c:chart xmlns:c="http://schemas.openxmlformats.org/drawingml/2006/chart" r:id="rId1"/>
+            <c:chart xmlns:c="http://schemas.openxmlformats.org/drawingml/2006/chart" xmlns:r="http://schemas.openxmlformats.org/officeDocument/2006/relationships" r:id="rId3"/>
           </a:graphicData>
         </a:graphic>
       </p:graphicFrame>
       <p:graphicFrame>
         <p:nvGraphicFramePr>
-          <p:cNvPr id="6" name="Chart 1" descr=""/>
+          <p:cNvPr id="6" name="Chart 1"/>
           <p:cNvGraphicFramePr/>
           <p:nvPr/>
         </p:nvGraphicFramePr>
@@ -9616,9 +9123,9 @@
           <a:off x="6199632" y="1508760"/>
           <a:ext cx="5440680" cy="3703320"/>
         </p:xfrm>
-        <a:graphic xmlns:a="http://schemas.openxmlformats.org/drawingml/2006/main">
+        <a:graphic>
           <a:graphicData uri="http://schemas.openxmlformats.org/drawingml/2006/chart">
-            <c:chart xmlns:c="http://schemas.openxmlformats.org/drawingml/2006/chart" r:id="rId2"/>
+            <c:chart xmlns:c="http://schemas.openxmlformats.org/drawingml/2006/chart" xmlns:r="http://schemas.openxmlformats.org/officeDocument/2006/relationships" r:id="rId4"/>
           </a:graphicData>
         </a:graphic>
       </p:graphicFrame>
@@ -9670,7 +9177,7 @@
           <a:bodyPr wrap="square" lIns="0" tIns="0" rIns="0" bIns="0" rtlCol="0" anchor="ctr"/>
           <a:lstStyle/>
           <a:p>
-            <a:pPr indent="0" marL="0">
+            <a:pPr marL="0" indent="0">
               <a:spcAft>
                 <a:spcPts val="200"/>
               </a:spcAft>
@@ -9684,30 +9191,24 @@
               </a:rPr>
               <a:t>Temuan: </a:t>
             </a:r>
-            <a:pPr indent="0" marL="0">
+            <a:r>
+              <a:rPr lang="en-US" sz="1600" dirty="0">
+                <a:solidFill>
+                  <a:srgbClr val="2B3036"/>
+                </a:solidFill>
+              </a:rPr>
+              <a:t>pemohon yang memakai lebih dari 90% limit kartunya berisiko 3,6 kali lipat, dan yang punya 6 pinjaman aktif atau lebih berisiko 2,4 kali lipat dibanding yang tidak punya.</a:t>
+            </a:r>
+            <a:endParaRPr lang="en-US" sz="1600" dirty="0"/>
+          </a:p>
+          <a:p>
+            <a:pPr marL="0" indent="0">
               <a:spcAft>
                 <a:spcPts val="200"/>
               </a:spcAft>
               <a:buNone/>
             </a:pPr>
             <a:r>
-              <a:rPr lang="en-US" sz="1600" dirty="0">
-                <a:solidFill>
-                  <a:srgbClr val="2B3036"/>
-                </a:solidFill>
-              </a:rPr>
-              <a:t>pemohon yang memakai lebih dari 90% limit kartunya berisiko 3,6 kali lipat, dan yang punya 6 pinjaman aktif atau lebih berisiko 2,4 kali lipat dibanding yang tidak punya.</a:t>
-            </a:r>
-            <a:endParaRPr lang="en-US" sz="1600" dirty="0"/>
-          </a:p>
-          <a:p>
-            <a:pPr indent="0" marL="0">
-              <a:spcAft>
-                <a:spcPts val="200"/>
-              </a:spcAft>
-              <a:buNone/>
-            </a:pPr>
-            <a:r>
               <a:rPr lang="en-US" sz="1600" b="1" dirty="0">
                 <a:solidFill>
                   <a:srgbClr val="C8102E"/>
@@ -9715,12 +9216,6 @@
               </a:rPr>
               <a:t>Aksi: </a:t>
             </a:r>
-            <a:pPr indent="0" marL="0">
-              <a:spcAft>
-                <a:spcPts val="200"/>
-              </a:spcAft>
-              <a:buNone/>
-            </a:pPr>
             <a:r>
               <a:rPr lang="en-US" sz="1600" dirty="0">
                 <a:solidFill>
@@ -9754,7 +9249,7 @@
           <a:bodyPr wrap="square" lIns="0" tIns="0" rIns="0" bIns="0" rtlCol="0" anchor="ctr"/>
           <a:lstStyle/>
           <a:p>
-            <a:pPr algn="r" indent="0" marL="0">
+            <a:pPr marL="0" indent="0" algn="r">
               <a:buNone/>
             </a:pPr>
             <a:r>
@@ -9785,6 +9280,7 @@
         <a:solidFill>
           <a:srgbClr val="FFFFFF"/>
         </a:solidFill>
+        <a:effectLst/>
       </p:bgPr>
     </p:bg>
     <p:spTree>
@@ -9822,11 +9318,11 @@
           <a:bodyPr wrap="square" lIns="0" tIns="0" rIns="0" bIns="0" rtlCol="0" anchor="ctr"/>
           <a:lstStyle/>
           <a:p>
-            <a:pPr indent="0" marL="0">
-              <a:buNone/>
-            </a:pPr>
-            <a:r>
-              <a:rPr lang="en-US" sz="1200" b="1" spc="200" kern="0" dirty="0">
+            <a:pPr marL="0" indent="0">
+              <a:buNone/>
+            </a:pPr>
+            <a:r>
+              <a:rPr lang="en-US" sz="1200" b="1" kern="0" spc="200" dirty="0">
                 <a:solidFill>
                   <a:srgbClr val="C8102E"/>
                 </a:solidFill>
@@ -9858,7 +9354,7 @@
           <a:bodyPr wrap="square" lIns="0" tIns="0" rIns="0" bIns="0" rtlCol="0" anchor="ctr"/>
           <a:lstStyle/>
           <a:p>
-            <a:pPr indent="0" marL="0">
+            <a:pPr marL="0" indent="0">
               <a:buNone/>
             </a:pPr>
             <a:r>
@@ -9897,7 +9393,7 @@
           <a:bodyPr wrap="square" lIns="0" tIns="0" rIns="0" bIns="0" rtlCol="0" anchor="ctr"/>
           <a:lstStyle/>
           <a:p>
-            <a:pPr algn="r" indent="0" marL="0">
+            <a:pPr marL="0" indent="0" algn="r">
               <a:buNone/>
             </a:pPr>
             <a:r>
@@ -9906,18 +9402,7 @@
                   <a:srgbClr val="C8102E"/>
                 </a:solidFill>
               </a:rPr>
-              <a:t>HOME</a:t>
-            </a:r>
-            <a:pPr algn="r" indent="0" marL="0">
-              <a:buNone/>
-            </a:pPr>
-            <a:r>
-              <a:rPr lang="en-US" sz="1600" b="1" dirty="0">
-                <a:solidFill>
-                  <a:srgbClr val="C8102E"/>
-                </a:solidFill>
-              </a:rPr>
-              <a:t> CREDIT</a:t>
+              <a:t>HOME CREDIT</a:t>
             </a:r>
             <a:endParaRPr lang="en-US" sz="1600" dirty="0"/>
           </a:p>
@@ -9925,7 +9410,7 @@
       </p:sp>
       <p:graphicFrame>
         <p:nvGraphicFramePr>
-          <p:cNvPr id="5" name="Chart 0" descr=""/>
+          <p:cNvPr id="5" name="Chart 0"/>
           <p:cNvGraphicFramePr/>
           <p:nvPr/>
         </p:nvGraphicFramePr>
@@ -9933,9 +9418,9 @@
           <a:off x="548640" y="1508760"/>
           <a:ext cx="5486400" cy="3749040"/>
         </p:xfrm>
-        <a:graphic xmlns:a="http://schemas.openxmlformats.org/drawingml/2006/main">
+        <a:graphic>
           <a:graphicData uri="http://schemas.openxmlformats.org/drawingml/2006/chart">
-            <c:chart xmlns:c="http://schemas.openxmlformats.org/drawingml/2006/chart" r:id="rId1"/>
+            <c:chart xmlns:c="http://schemas.openxmlformats.org/drawingml/2006/chart" xmlns:r="http://schemas.openxmlformats.org/officeDocument/2006/relationships" r:id="rId3"/>
           </a:graphicData>
         </a:graphic>
       </p:graphicFrame>
@@ -9960,7 +9445,7 @@
           <a:bodyPr wrap="square" lIns="0" tIns="0" rIns="0" bIns="0" rtlCol="0" anchor="t"/>
           <a:lstStyle/>
           <a:p>
-            <a:pPr indent="0" marL="0">
+            <a:pPr marL="0" indent="0">
               <a:spcAft>
                 <a:spcPts val="600"/>
               </a:spcAft>
@@ -10024,7 +9509,7 @@
           <a:bodyPr wrap="square" lIns="0" tIns="0" rIns="0" bIns="0" rtlCol="0" anchor="ctr"/>
           <a:lstStyle/>
           <a:p>
-            <a:pPr algn="ctr" indent="0" marL="0">
+            <a:pPr marL="0" indent="0" algn="ctr">
               <a:buNone/>
             </a:pPr>
             <a:r>
@@ -10060,7 +9545,7 @@
           <a:bodyPr wrap="square" lIns="0" tIns="0" rIns="0" bIns="0" rtlCol="0" anchor="ctr"/>
           <a:lstStyle/>
           <a:p>
-            <a:pPr indent="0" marL="0">
+            <a:pPr marL="0" indent="0">
               <a:buNone/>
             </a:pPr>
             <a:r>
@@ -10096,7 +9581,7 @@
           <a:bodyPr wrap="square" lIns="0" tIns="0" rIns="0" bIns="0" rtlCol="0" anchor="t"/>
           <a:lstStyle/>
           <a:p>
-            <a:pPr indent="0" marL="0">
+            <a:pPr marL="0" indent="0">
               <a:spcAft>
                 <a:spcPts val="600"/>
               </a:spcAft>
@@ -10160,7 +9645,7 @@
           <a:bodyPr wrap="square" lIns="0" tIns="0" rIns="0" bIns="0" rtlCol="0" anchor="ctr"/>
           <a:lstStyle/>
           <a:p>
-            <a:pPr algn="ctr" indent="0" marL="0">
+            <a:pPr marL="0" indent="0" algn="ctr">
               <a:buNone/>
             </a:pPr>
             <a:r>
@@ -10196,7 +9681,7 @@
           <a:bodyPr wrap="square" lIns="0" tIns="0" rIns="0" bIns="0" rtlCol="0" anchor="ctr"/>
           <a:lstStyle/>
           <a:p>
-            <a:pPr indent="0" marL="0">
+            <a:pPr marL="0" indent="0">
               <a:buNone/>
             </a:pPr>
             <a:r>
@@ -10232,7 +9717,7 @@
           <a:bodyPr wrap="square" lIns="0" tIns="0" rIns="0" bIns="0" rtlCol="0" anchor="t"/>
           <a:lstStyle/>
           <a:p>
-            <a:pPr indent="0" marL="0">
+            <a:pPr marL="0" indent="0">
               <a:spcAft>
                 <a:spcPts val="600"/>
               </a:spcAft>
@@ -10296,7 +9781,7 @@
           <a:bodyPr wrap="square" lIns="0" tIns="0" rIns="0" bIns="0" rtlCol="0" anchor="ctr"/>
           <a:lstStyle/>
           <a:p>
-            <a:pPr algn="ctr" indent="0" marL="0">
+            <a:pPr marL="0" indent="0" algn="ctr">
               <a:buNone/>
             </a:pPr>
             <a:r>
@@ -10332,7 +9817,7 @@
           <a:bodyPr wrap="square" lIns="0" tIns="0" rIns="0" bIns="0" rtlCol="0" anchor="ctr"/>
           <a:lstStyle/>
           <a:p>
-            <a:pPr indent="0" marL="0">
+            <a:pPr marL="0" indent="0">
               <a:buNone/>
             </a:pPr>
             <a:r>
@@ -10368,7 +9853,7 @@
           <a:bodyPr wrap="square" lIns="0" tIns="0" rIns="0" bIns="0" rtlCol="0" anchor="t"/>
           <a:lstStyle/>
           <a:p>
-            <a:pPr indent="0" marL="0">
+            <a:pPr marL="0" indent="0">
               <a:spcAft>
                 <a:spcPts val="600"/>
               </a:spcAft>
@@ -10432,7 +9917,7 @@
           <a:bodyPr wrap="square" lIns="0" tIns="0" rIns="0" bIns="0" rtlCol="0" anchor="ctr"/>
           <a:lstStyle/>
           <a:p>
-            <a:pPr algn="ctr" indent="0" marL="0">
+            <a:pPr marL="0" indent="0" algn="ctr">
               <a:buNone/>
             </a:pPr>
             <a:r>
@@ -10468,7 +9953,7 @@
           <a:bodyPr wrap="square" lIns="0" tIns="0" rIns="0" bIns="0" rtlCol="0" anchor="ctr"/>
           <a:lstStyle/>
           <a:p>
-            <a:pPr indent="0" marL="0">
+            <a:pPr marL="0" indent="0">
               <a:buNone/>
             </a:pPr>
             <a:r>
@@ -10504,7 +9989,7 @@
           <a:bodyPr wrap="square" lIns="0" tIns="0" rIns="0" bIns="0" rtlCol="0" anchor="t"/>
           <a:lstStyle/>
           <a:p>
-            <a:pPr indent="0" marL="0">
+            <a:pPr marL="0" indent="0">
               <a:spcAft>
                 <a:spcPts val="600"/>
               </a:spcAft>
@@ -10543,7 +10028,7 @@
           <a:bodyPr wrap="square" lIns="0" tIns="0" rIns="0" bIns="0" rtlCol="0" anchor="ctr"/>
           <a:lstStyle/>
           <a:p>
-            <a:pPr algn="r" indent="0" marL="0">
+            <a:pPr marL="0" indent="0" algn="r">
               <a:buNone/>
             </a:pPr>
             <a:r>
@@ -10574,6 +10059,7 @@
         <a:solidFill>
           <a:srgbClr val="1F2328"/>
         </a:solidFill>
+        <a:effectLst/>
       </p:bgPr>
     </p:bg>
     <p:spTree>
@@ -10611,11 +10097,11 @@
           <a:bodyPr wrap="square" lIns="0" tIns="0" rIns="0" bIns="0" rtlCol="0" anchor="ctr"/>
           <a:lstStyle/>
           <a:p>
-            <a:pPr indent="0" marL="0">
-              <a:buNone/>
-            </a:pPr>
-            <a:r>
-              <a:rPr lang="en-US" sz="1200" b="1" spc="200" kern="0" dirty="0">
+            <a:pPr marL="0" indent="0">
+              <a:buNone/>
+            </a:pPr>
+            <a:r>
+              <a:rPr lang="en-US" sz="1200" b="1" kern="0" spc="200" dirty="0">
                 <a:solidFill>
                   <a:srgbClr val="C8102E"/>
                 </a:solidFill>
@@ -10647,7 +10133,7 @@
           <a:bodyPr wrap="square" lIns="0" tIns="0" rIns="0" bIns="0" rtlCol="0" anchor="ctr"/>
           <a:lstStyle/>
           <a:p>
-            <a:pPr indent="0" marL="0">
+            <a:pPr marL="0" indent="0">
               <a:buNone/>
             </a:pPr>
             <a:r>
@@ -10686,7 +10172,7 @@
           <a:bodyPr wrap="square" lIns="0" tIns="0" rIns="0" bIns="0" rtlCol="0" anchor="ctr"/>
           <a:lstStyle/>
           <a:p>
-            <a:pPr algn="r" indent="0" marL="0">
+            <a:pPr marL="0" indent="0" algn="r">
               <a:buNone/>
             </a:pPr>
             <a:r>
@@ -10695,18 +10181,7 @@
                   <a:srgbClr val="C8102E"/>
                 </a:solidFill>
               </a:rPr>
-              <a:t>HOME</a:t>
-            </a:r>
-            <a:pPr algn="r" indent="0" marL="0">
-              <a:buNone/>
-            </a:pPr>
-            <a:r>
-              <a:rPr lang="en-US" sz="1600" b="1" dirty="0">
-                <a:solidFill>
-                  <a:srgbClr val="C8102E"/>
-                </a:solidFill>
-              </a:rPr>
-              <a:t> CREDIT</a:t>
+              <a:t>HOME CREDIT</a:t>
             </a:r>
             <a:endParaRPr lang="en-US" sz="1600" dirty="0"/>
           </a:p>
@@ -10760,7 +10235,7 @@
           <a:bodyPr wrap="square" lIns="0" tIns="0" rIns="0" bIns="0" rtlCol="0" anchor="ctr"/>
           <a:lstStyle/>
           <a:p>
-            <a:pPr indent="0" marL="0">
+            <a:pPr marL="0" indent="0">
               <a:buNone/>
             </a:pPr>
             <a:r>
@@ -10799,7 +10274,7 @@
           <a:bodyPr wrap="square" lIns="0" tIns="0" rIns="0" bIns="0" rtlCol="0" anchor="t"/>
           <a:lstStyle/>
           <a:p>
-            <a:pPr indent="0" marL="0">
+            <a:pPr marL="0" indent="0">
               <a:buNone/>
             </a:pPr>
             <a:r>
@@ -10862,7 +10337,7 @@
           <a:bodyPr wrap="square" lIns="0" tIns="0" rIns="0" bIns="0" rtlCol="0" anchor="ctr"/>
           <a:lstStyle/>
           <a:p>
-            <a:pPr indent="0" marL="0">
+            <a:pPr marL="0" indent="0">
               <a:buNone/>
             </a:pPr>
             <a:r>
@@ -10901,7 +10376,7 @@
           <a:bodyPr wrap="square" lIns="0" tIns="0" rIns="0" bIns="0" rtlCol="0" anchor="t"/>
           <a:lstStyle/>
           <a:p>
-            <a:pPr indent="0" marL="0">
+            <a:pPr marL="0" indent="0">
               <a:buNone/>
             </a:pPr>
             <a:r>
@@ -10964,7 +10439,7 @@
           <a:bodyPr wrap="square" lIns="0" tIns="0" rIns="0" bIns="0" rtlCol="0" anchor="ctr"/>
           <a:lstStyle/>
           <a:p>
-            <a:pPr indent="0" marL="0">
+            <a:pPr marL="0" indent="0">
               <a:buNone/>
             </a:pPr>
             <a:r>
@@ -11003,7 +10478,7 @@
           <a:bodyPr wrap="square" lIns="0" tIns="0" rIns="0" bIns="0" rtlCol="0" anchor="t"/>
           <a:lstStyle/>
           <a:p>
-            <a:pPr indent="0" marL="0">
+            <a:pPr marL="0" indent="0">
               <a:buNone/>
             </a:pPr>
             <a:r>
@@ -11066,7 +10541,7 @@
           <a:bodyPr wrap="square" lIns="0" tIns="0" rIns="0" bIns="0" rtlCol="0" anchor="ctr"/>
           <a:lstStyle/>
           <a:p>
-            <a:pPr indent="0" marL="0">
+            <a:pPr marL="0" indent="0">
               <a:buNone/>
             </a:pPr>
             <a:r>
@@ -11105,7 +10580,7 @@
           <a:bodyPr wrap="square" lIns="0" tIns="0" rIns="0" bIns="0" rtlCol="0" anchor="t"/>
           <a:lstStyle/>
           <a:p>
-            <a:pPr indent="0" marL="0">
+            <a:pPr marL="0" indent="0">
               <a:buNone/>
             </a:pPr>
             <a:r>
@@ -11141,7 +10616,7 @@
           <a:bodyPr wrap="square" lIns="0" tIns="0" rIns="0" bIns="0" rtlCol="0" anchor="ctr"/>
           <a:lstStyle/>
           <a:p>
-            <a:pPr indent="0" marL="0">
+            <a:pPr marL="0" indent="0">
               <a:buNone/>
             </a:pPr>
             <a:r>
@@ -11202,7 +10677,7 @@
           <a:bodyPr wrap="square" lIns="0" tIns="0" rIns="0" bIns="0" rtlCol="0" anchor="ctr"/>
           <a:lstStyle/>
           <a:p>
-            <a:pPr algn="ctr" indent="0" marL="0">
+            <a:pPr marL="0" indent="0" algn="ctr">
               <a:buNone/>
             </a:pPr>
             <a:endParaRPr lang="en-US" sz="1300" dirty="0"/>
@@ -11255,7 +10730,7 @@
           <a:bodyPr wrap="square" lIns="0" tIns="0" rIns="0" bIns="0" rtlCol="0" anchor="ctr"/>
           <a:lstStyle/>
           <a:p>
-            <a:pPr algn="ctr" indent="0" marL="0">
+            <a:pPr marL="0" indent="0" algn="ctr">
               <a:buNone/>
             </a:pPr>
             <a:r>
@@ -11316,7 +10791,7 @@
           <a:bodyPr wrap="square" lIns="0" tIns="0" rIns="0" bIns="0" rtlCol="0" anchor="ctr"/>
           <a:lstStyle/>
           <a:p>
-            <a:pPr algn="ctr" indent="0" marL="0">
+            <a:pPr marL="0" indent="0" algn="ctr">
               <a:buNone/>
             </a:pPr>
             <a:r>
@@ -11377,7 +10852,7 @@
           <a:bodyPr wrap="square" lIns="0" tIns="0" rIns="0" bIns="0" rtlCol="0" anchor="ctr"/>
           <a:lstStyle/>
           <a:p>
-            <a:pPr algn="ctr" indent="0" marL="0">
+            <a:pPr marL="0" indent="0" algn="ctr">
               <a:buNone/>
             </a:pPr>
             <a:r>
@@ -11438,7 +10913,7 @@
           <a:bodyPr wrap="square" lIns="0" tIns="0" rIns="0" bIns="0" rtlCol="0" anchor="ctr"/>
           <a:lstStyle/>
           <a:p>
-            <a:pPr algn="ctr" indent="0" marL="0">
+            <a:pPr marL="0" indent="0" algn="ctr">
               <a:buNone/>
             </a:pPr>
             <a:r>
@@ -11499,7 +10974,7 @@
           <a:bodyPr wrap="square" lIns="0" tIns="0" rIns="0" bIns="0" rtlCol="0" anchor="ctr"/>
           <a:lstStyle/>
           <a:p>
-            <a:pPr algn="ctr" indent="0" marL="0">
+            <a:pPr marL="0" indent="0" algn="ctr">
               <a:buNone/>
             </a:pPr>
             <a:r>
@@ -11560,7 +11035,7 @@
           <a:bodyPr wrap="square" lIns="0" tIns="0" rIns="0" bIns="0" rtlCol="0" anchor="ctr"/>
           <a:lstStyle/>
           <a:p>
-            <a:pPr algn="ctr" indent="0" marL="0">
+            <a:pPr marL="0" indent="0" algn="ctr">
               <a:buNone/>
             </a:pPr>
             <a:r>
@@ -11621,7 +11096,7 @@
           <a:bodyPr wrap="square" lIns="0" tIns="0" rIns="0" bIns="0" rtlCol="0" anchor="ctr"/>
           <a:lstStyle/>
           <a:p>
-            <a:pPr algn="ctr" indent="0" marL="0">
+            <a:pPr marL="0" indent="0" algn="ctr">
               <a:buNone/>
             </a:pPr>
             <a:r>
@@ -11682,7 +11157,7 @@
           <a:bodyPr wrap="square" lIns="0" tIns="0" rIns="0" bIns="0" rtlCol="0" anchor="ctr"/>
           <a:lstStyle/>
           <a:p>
-            <a:pPr algn="ctr" indent="0" marL="0">
+            <a:pPr marL="0" indent="0" algn="ctr">
               <a:buNone/>
             </a:pPr>
             <a:r>
@@ -11718,7 +11193,7 @@
           <a:bodyPr wrap="square" lIns="0" tIns="0" rIns="0" bIns="0" rtlCol="0" anchor="t"/>
           <a:lstStyle/>
           <a:p>
-            <a:pPr indent="0" marL="0">
+            <a:pPr marL="0" indent="0">
               <a:spcAft>
                 <a:spcPts val="600"/>
               </a:spcAft>
@@ -11738,7 +11213,7 @@
       </p:sp>
       <p:graphicFrame>
         <p:nvGraphicFramePr>
-          <p:cNvPr id="37" name="Chart 0" descr=""/>
+          <p:cNvPr id="37" name="Chart 0"/>
           <p:cNvGraphicFramePr/>
           <p:nvPr/>
         </p:nvGraphicFramePr>
@@ -11746,9 +11221,9 @@
           <a:off x="6172200" y="3383280"/>
           <a:ext cx="5468112" cy="3017520"/>
         </p:xfrm>
-        <a:graphic xmlns:a="http://schemas.openxmlformats.org/drawingml/2006/main">
+        <a:graphic>
           <a:graphicData uri="http://schemas.openxmlformats.org/drawingml/2006/chart">
-            <c:chart xmlns:c="http://schemas.openxmlformats.org/drawingml/2006/chart" r:id="rId1"/>
+            <c:chart xmlns:c="http://schemas.openxmlformats.org/drawingml/2006/chart" xmlns:r="http://schemas.openxmlformats.org/officeDocument/2006/relationships" r:id="rId3"/>
           </a:graphicData>
         </a:graphic>
       </p:graphicFrame>
@@ -11773,7 +11248,7 @@
           <a:bodyPr wrap="square" lIns="0" tIns="0" rIns="0" bIns="0" rtlCol="0" anchor="ctr"/>
           <a:lstStyle/>
           <a:p>
-            <a:pPr algn="r" indent="0" marL="0">
+            <a:pPr marL="0" indent="0" algn="r">
               <a:buNone/>
             </a:pPr>
             <a:r>
@@ -11804,6 +11279,7 @@
         <a:solidFill>
           <a:srgbClr val="FFFFFF"/>
         </a:solidFill>
+        <a:effectLst/>
       </p:bgPr>
     </p:bg>
     <p:spTree>
@@ -11841,11 +11317,11 @@
           <a:bodyPr wrap="square" lIns="0" tIns="0" rIns="0" bIns="0" rtlCol="0" anchor="ctr"/>
           <a:lstStyle/>
           <a:p>
-            <a:pPr indent="0" marL="0">
-              <a:buNone/>
-            </a:pPr>
-            <a:r>
-              <a:rPr lang="en-US" sz="1200" b="1" spc="200" kern="0" dirty="0">
+            <a:pPr marL="0" indent="0">
+              <a:buNone/>
+            </a:pPr>
+            <a:r>
+              <a:rPr lang="en-US" sz="1200" b="1" kern="0" spc="200" dirty="0">
                 <a:solidFill>
                   <a:srgbClr val="C8102E"/>
                 </a:solidFill>
@@ -11877,7 +11353,7 @@
           <a:bodyPr wrap="square" lIns="0" tIns="0" rIns="0" bIns="0" rtlCol="0" anchor="ctr"/>
           <a:lstStyle/>
           <a:p>
-            <a:pPr indent="0" marL="0">
+            <a:pPr marL="0" indent="0">
               <a:buNone/>
             </a:pPr>
             <a:r>
@@ -11916,7 +11392,7 @@
           <a:bodyPr wrap="square" lIns="0" tIns="0" rIns="0" bIns="0" rtlCol="0" anchor="ctr"/>
           <a:lstStyle/>
           <a:p>
-            <a:pPr algn="r" indent="0" marL="0">
+            <a:pPr marL="0" indent="0" algn="r">
               <a:buNone/>
             </a:pPr>
             <a:r>
@@ -11925,18 +11401,7 @@
                   <a:srgbClr val="C8102E"/>
                 </a:solidFill>
               </a:rPr>
-              <a:t>HOME</a:t>
-            </a:r>
-            <a:pPr algn="r" indent="0" marL="0">
-              <a:buNone/>
-            </a:pPr>
-            <a:r>
-              <a:rPr lang="en-US" sz="1600" b="1" dirty="0">
-                <a:solidFill>
-                  <a:srgbClr val="C8102E"/>
-                </a:solidFill>
-              </a:rPr>
-              <a:t> CREDIT</a:t>
+              <a:t>HOME CREDIT</a:t>
             </a:r>
             <a:endParaRPr lang="en-US" sz="1600" dirty="0"/>
           </a:p>
@@ -11944,7 +11409,7 @@
       </p:sp>
       <p:graphicFrame>
         <p:nvGraphicFramePr>
-          <p:cNvPr id="5" name="Chart 0" descr=""/>
+          <p:cNvPr id="5" name="Chart 0"/>
           <p:cNvGraphicFramePr/>
           <p:nvPr/>
         </p:nvGraphicFramePr>
@@ -11952,9 +11417,9 @@
           <a:off x="548640" y="1508760"/>
           <a:ext cx="6309360" cy="3886200"/>
         </p:xfrm>
-        <a:graphic xmlns:a="http://schemas.openxmlformats.org/drawingml/2006/main">
+        <a:graphic>
           <a:graphicData uri="http://schemas.openxmlformats.org/drawingml/2006/chart">
-            <c:chart xmlns:c="http://schemas.openxmlformats.org/drawingml/2006/chart" r:id="rId1"/>
+            <c:chart xmlns:c="http://schemas.openxmlformats.org/drawingml/2006/chart" xmlns:r="http://schemas.openxmlformats.org/officeDocument/2006/relationships" r:id="rId3"/>
           </a:graphicData>
         </a:graphic>
       </p:graphicFrame>
@@ -11979,7 +11444,7 @@
           <a:bodyPr wrap="square" lIns="0" tIns="0" rIns="0" bIns="0" rtlCol="0" anchor="t"/>
           <a:lstStyle/>
           <a:p>
-            <a:pPr indent="0" marL="0">
+            <a:pPr marL="0" indent="0">
               <a:spcAft>
                 <a:spcPts val="600"/>
               </a:spcAft>
@@ -12045,7 +11510,7 @@
           <a:bodyPr wrap="square" lIns="0" tIns="0" rIns="0" bIns="0" rtlCol="0" anchor="ctr"/>
           <a:lstStyle/>
           <a:p>
-            <a:pPr indent="0" marL="0">
+            <a:pPr marL="0" indent="0">
               <a:buNone/>
             </a:pPr>
             <a:r>
@@ -12059,7 +11524,7 @@
             <a:endParaRPr lang="en-US" sz="1600" dirty="0"/>
           </a:p>
           <a:p>
-            <a:pPr indent="0" marL="0">
+            <a:pPr marL="0" indent="0">
               <a:buNone/>
             </a:pPr>
             <a:r>
@@ -12122,7 +11587,7 @@
           <a:bodyPr wrap="square" lIns="0" tIns="0" rIns="0" bIns="0" rtlCol="0" anchor="ctr"/>
           <a:lstStyle/>
           <a:p>
-            <a:pPr indent="0" marL="0">
+            <a:pPr marL="0" indent="0">
               <a:buNone/>
             </a:pPr>
             <a:r>
@@ -12136,7 +11601,7 @@
             <a:endParaRPr lang="en-US" sz="1600" dirty="0"/>
           </a:p>
           <a:p>
-            <a:pPr indent="0" marL="0">
+            <a:pPr marL="0" indent="0">
               <a:buNone/>
             </a:pPr>
             <a:r>
@@ -12199,7 +11664,7 @@
           <a:bodyPr wrap="square" lIns="0" tIns="0" rIns="0" bIns="0" rtlCol="0" anchor="ctr"/>
           <a:lstStyle/>
           <a:p>
-            <a:pPr indent="0" marL="0">
+            <a:pPr marL="0" indent="0">
               <a:buNone/>
             </a:pPr>
             <a:r>
@@ -12213,7 +11678,7 @@
             <a:endParaRPr lang="en-US" sz="1600" dirty="0"/>
           </a:p>
           <a:p>
-            <a:pPr indent="0" marL="0">
+            <a:pPr marL="0" indent="0">
               <a:buNone/>
             </a:pPr>
             <a:r>
@@ -12276,7 +11741,7 @@
           <a:bodyPr wrap="square" lIns="0" tIns="0" rIns="0" bIns="0" rtlCol="0" anchor="ctr"/>
           <a:lstStyle/>
           <a:p>
-            <a:pPr indent="0" marL="0">
+            <a:pPr marL="0" indent="0">
               <a:buNone/>
             </a:pPr>
             <a:r>
@@ -12290,7 +11755,7 @@
             <a:endParaRPr lang="en-US" sz="2200" dirty="0"/>
           </a:p>
           <a:p>
-            <a:pPr indent="0" marL="0">
+            <a:pPr marL="0" indent="0">
               <a:buNone/>
             </a:pPr>
             <a:r>
@@ -12326,7 +11791,7 @@
           <a:bodyPr wrap="square" lIns="0" tIns="0" rIns="0" bIns="0" rtlCol="0" anchor="ctr"/>
           <a:lstStyle/>
           <a:p>
-            <a:pPr algn="r" indent="0" marL="0">
+            <a:pPr marL="0" indent="0" algn="r">
               <a:buNone/>
             </a:pPr>
             <a:r>
@@ -12642,4 +12107,319 @@
     </a:ext>
   </a:extLst>
 </a:theme>
+</file>
+
+<file path=ppt/theme/theme2.xml><?xml version="1.0" encoding="utf-8"?>
+<a:theme xmlns:a="http://schemas.openxmlformats.org/drawingml/2006/main" name="Office Theme">
+  <a:themeElements>
+    <a:clrScheme name="Office">
+      <a:dk1>
+        <a:sysClr val="windowText" lastClr="000000"/>
+      </a:dk1>
+      <a:lt1>
+        <a:sysClr val="window" lastClr="FFFFFF"/>
+      </a:lt1>
+      <a:dk2>
+        <a:srgbClr val="0E2841"/>
+      </a:dk2>
+      <a:lt2>
+        <a:srgbClr val="E8E8E8"/>
+      </a:lt2>
+      <a:accent1>
+        <a:srgbClr val="156082"/>
+      </a:accent1>
+      <a:accent2>
+        <a:srgbClr val="E97132"/>
+      </a:accent2>
+      <a:accent3>
+        <a:srgbClr val="196B24"/>
+      </a:accent3>
+      <a:accent4>
+        <a:srgbClr val="0F9ED5"/>
+      </a:accent4>
+      <a:accent5>
+        <a:srgbClr val="A02B93"/>
+      </a:accent5>
+      <a:accent6>
+        <a:srgbClr val="4EA72E"/>
+      </a:accent6>
+      <a:hlink>
+        <a:srgbClr val="467886"/>
+      </a:hlink>
+      <a:folHlink>
+        <a:srgbClr val="96607D"/>
+      </a:folHlink>
+    </a:clrScheme>
+    <a:fontScheme name="Office">
+      <a:majorFont>
+        <a:latin typeface="Aptos Display" panose="02110004020202020204"/>
+        <a:ea typeface=""/>
+        <a:cs typeface=""/>
+        <a:font script="Jpan" typeface="游ゴシック Light"/>
+        <a:font script="Hang" typeface="맑은 고딕"/>
+        <a:font script="Hans" typeface="等线 Light"/>
+        <a:font script="Hant" typeface="新細明體"/>
+        <a:font script="Arab" typeface="Times New Roman"/>
+        <a:font script="Hebr" typeface="Times New Roman"/>
+        <a:font script="Thai" typeface="Angsana New"/>
+        <a:font script="Ethi" typeface="Nyala"/>
+        <a:font script="Beng" typeface="Vrinda"/>
+        <a:font script="Gujr" typeface="Shruti"/>
+        <a:font script="Khmr" typeface="MoolBoran"/>
+        <a:font script="Knda" typeface="Tunga"/>
+        <a:font script="Guru" typeface="Raavi"/>
+        <a:font script="Cans" typeface="Euphemia"/>
+        <a:font script="Cher" typeface="Plantagenet Cherokee"/>
+        <a:font script="Yiii" typeface="Microsoft Yi Baiti"/>
+        <a:font script="Tibt" typeface="Microsoft Himalaya"/>
+        <a:font script="Thaa" typeface="MV Boli"/>
+        <a:font script="Deva" typeface="Mangal"/>
+        <a:font script="Telu" typeface="Gautami"/>
+        <a:font script="Taml" typeface="Latha"/>
+        <a:font script="Syrc" typeface="Estrangelo Edessa"/>
+        <a:font script="Orya" typeface="Kalinga"/>
+        <a:font script="Mlym" typeface="Kartika"/>
+        <a:font script="Laoo" typeface="DokChampa"/>
+        <a:font script="Sinh" typeface="Iskoola Pota"/>
+        <a:font script="Mong" typeface="Mongolian Baiti"/>
+        <a:font script="Viet" typeface="Times New Roman"/>
+        <a:font script="Uigh" typeface="Microsoft Uighur"/>
+        <a:font script="Geor" typeface="Sylfaen"/>
+        <a:font script="Armn" typeface="Arial"/>
+        <a:font script="Bugi" typeface="Leelawadee UI"/>
+        <a:font script="Bopo" typeface="Microsoft JhengHei"/>
+        <a:font script="Java" typeface="Javanese Text"/>
+        <a:font script="Lisu" typeface="Segoe UI"/>
+        <a:font script="Mymr" typeface="Myanmar Text"/>
+        <a:font script="Nkoo" typeface="Ebrima"/>
+        <a:font script="Olck" typeface="Nirmala UI"/>
+        <a:font script="Osma" typeface="Ebrima"/>
+        <a:font script="Phag" typeface="Phagspa"/>
+        <a:font script="Syrn" typeface="Estrangelo Edessa"/>
+        <a:font script="Syrj" typeface="Estrangelo Edessa"/>
+        <a:font script="Syre" typeface="Estrangelo Edessa"/>
+        <a:font script="Sora" typeface="Nirmala UI"/>
+        <a:font script="Tale" typeface="Microsoft Tai Le"/>
+        <a:font script="Talu" typeface="Microsoft New Tai Lue"/>
+        <a:font script="Tfng" typeface="Ebrima"/>
+      </a:majorFont>
+      <a:minorFont>
+        <a:latin typeface="Aptos" panose="02110004020202020204"/>
+        <a:ea typeface=""/>
+        <a:cs typeface=""/>
+        <a:font script="Jpan" typeface="游ゴシック"/>
+        <a:font script="Hang" typeface="맑은 고딕"/>
+        <a:font script="Hans" typeface="等线"/>
+        <a:font script="Hant" typeface="新細明體"/>
+        <a:font script="Arab" typeface="Arial"/>
+        <a:font script="Hebr" typeface="Arial"/>
+        <a:font script="Thai" typeface="Cordia New"/>
+        <a:font script="Ethi" typeface="Nyala"/>
+        <a:font script="Beng" typeface="Vrinda"/>
+        <a:font script="Gujr" typeface="Shruti"/>
+        <a:font script="Khmr" typeface="DaunPenh"/>
+        <a:font script="Knda" typeface="Tunga"/>
+        <a:font script="Guru" typeface="Raavi"/>
+        <a:font script="Cans" typeface="Euphemia"/>
+        <a:font script="Cher" typeface="Plantagenet Cherokee"/>
+        <a:font script="Yiii" typeface="Microsoft Yi Baiti"/>
+        <a:font script="Tibt" typeface="Microsoft Himalaya"/>
+        <a:font script="Thaa" typeface="MV Boli"/>
+        <a:font script="Deva" typeface="Mangal"/>
+        <a:font script="Telu" typeface="Gautami"/>
+        <a:font script="Taml" typeface="Latha"/>
+        <a:font script="Syrc" typeface="Estrangelo Edessa"/>
+        <a:font script="Orya" typeface="Kalinga"/>
+        <a:font script="Mlym" typeface="Kartika"/>
+        <a:font script="Laoo" typeface="DokChampa"/>
+        <a:font script="Sinh" typeface="Iskoola Pota"/>
+        <a:font script="Mong" typeface="Mongolian Baiti"/>
+        <a:font script="Viet" typeface="Arial"/>
+        <a:font script="Uigh" typeface="Microsoft Uighur"/>
+        <a:font script="Geor" typeface="Sylfaen"/>
+        <a:font script="Armn" typeface="Arial"/>
+        <a:font script="Bugi" typeface="Leelawadee UI"/>
+        <a:font script="Bopo" typeface="Microsoft JhengHei"/>
+        <a:font script="Java" typeface="Javanese Text"/>
+        <a:font script="Lisu" typeface="Segoe UI"/>
+        <a:font script="Mymr" typeface="Myanmar Text"/>
+        <a:font script="Nkoo" typeface="Ebrima"/>
+        <a:font script="Olck" typeface="Nirmala UI"/>
+        <a:font script="Osma" typeface="Ebrima"/>
+        <a:font script="Phag" typeface="Phagspa"/>
+        <a:font script="Syrn" typeface="Estrangelo Edessa"/>
+        <a:font script="Syrj" typeface="Estrangelo Edessa"/>
+        <a:font script="Syre" typeface="Estrangelo Edessa"/>
+        <a:font script="Sora" typeface="Nirmala UI"/>
+        <a:font script="Tale" typeface="Microsoft Tai Le"/>
+        <a:font script="Talu" typeface="Microsoft New Tai Lue"/>
+        <a:font script="Tfng" typeface="Ebrima"/>
+      </a:minorFont>
+    </a:fontScheme>
+    <a:fmtScheme name="Office">
+      <a:fillStyleLst>
+        <a:solidFill>
+          <a:schemeClr val="phClr"/>
+        </a:solidFill>
+        <a:gradFill rotWithShape="1">
+          <a:gsLst>
+            <a:gs pos="0">
+              <a:schemeClr val="phClr">
+                <a:lumMod val="110000"/>
+                <a:satMod val="105000"/>
+                <a:tint val="67000"/>
+              </a:schemeClr>
+            </a:gs>
+            <a:gs pos="50000">
+              <a:schemeClr val="phClr">
+                <a:lumMod val="105000"/>
+                <a:satMod val="103000"/>
+                <a:tint val="73000"/>
+              </a:schemeClr>
+            </a:gs>
+            <a:gs pos="100000">
+              <a:schemeClr val="phClr">
+                <a:lumMod val="105000"/>
+                <a:satMod val="109000"/>
+                <a:tint val="81000"/>
+              </a:schemeClr>
+            </a:gs>
+          </a:gsLst>
+          <a:lin ang="5400000" scaled="0"/>
+        </a:gradFill>
+        <a:gradFill rotWithShape="1">
+          <a:gsLst>
+            <a:gs pos="0">
+              <a:schemeClr val="phClr">
+                <a:satMod val="103000"/>
+                <a:lumMod val="102000"/>
+                <a:tint val="94000"/>
+              </a:schemeClr>
+            </a:gs>
+            <a:gs pos="50000">
+              <a:schemeClr val="phClr">
+                <a:satMod val="110000"/>
+                <a:lumMod val="100000"/>
+                <a:shade val="100000"/>
+              </a:schemeClr>
+            </a:gs>
+            <a:gs pos="100000">
+              <a:schemeClr val="phClr">
+                <a:lumMod val="99000"/>
+                <a:satMod val="120000"/>
+                <a:shade val="78000"/>
+              </a:schemeClr>
+            </a:gs>
+          </a:gsLst>
+          <a:lin ang="5400000" scaled="0"/>
+        </a:gradFill>
+      </a:fillStyleLst>
+      <a:lnStyleLst>
+        <a:ln w="12700" cap="flat" cmpd="sng" algn="ctr">
+          <a:solidFill>
+            <a:schemeClr val="phClr"/>
+          </a:solidFill>
+          <a:prstDash val="solid"/>
+          <a:miter lim="800000"/>
+        </a:ln>
+        <a:ln w="19050" cap="flat" cmpd="sng" algn="ctr">
+          <a:solidFill>
+            <a:schemeClr val="phClr"/>
+          </a:solidFill>
+          <a:prstDash val="solid"/>
+          <a:miter lim="800000"/>
+        </a:ln>
+        <a:ln w="25400" cap="flat" cmpd="sng" algn="ctr">
+          <a:solidFill>
+            <a:schemeClr val="phClr"/>
+          </a:solidFill>
+          <a:prstDash val="solid"/>
+          <a:miter lim="800000"/>
+        </a:ln>
+      </a:lnStyleLst>
+      <a:effectStyleLst>
+        <a:effectStyle>
+          <a:effectLst/>
+        </a:effectStyle>
+        <a:effectStyle>
+          <a:effectLst/>
+        </a:effectStyle>
+        <a:effectStyle>
+          <a:effectLst>
+            <a:outerShdw blurRad="57150" dist="19050" dir="5400000" algn="ctr" rotWithShape="0">
+              <a:srgbClr val="000000">
+                <a:alpha val="63000"/>
+              </a:srgbClr>
+            </a:outerShdw>
+          </a:effectLst>
+        </a:effectStyle>
+      </a:effectStyleLst>
+      <a:bgFillStyleLst>
+        <a:solidFill>
+          <a:schemeClr val="phClr"/>
+        </a:solidFill>
+        <a:solidFill>
+          <a:schemeClr val="phClr">
+            <a:tint val="95000"/>
+            <a:satMod val="170000"/>
+          </a:schemeClr>
+        </a:solidFill>
+        <a:gradFill rotWithShape="1">
+          <a:gsLst>
+            <a:gs pos="0">
+              <a:schemeClr val="phClr">
+                <a:tint val="93000"/>
+                <a:satMod val="150000"/>
+                <a:shade val="98000"/>
+                <a:lumMod val="102000"/>
+              </a:schemeClr>
+            </a:gs>
+            <a:gs pos="50000">
+              <a:schemeClr val="phClr">
+                <a:tint val="98000"/>
+                <a:satMod val="130000"/>
+                <a:shade val="90000"/>
+                <a:lumMod val="103000"/>
+              </a:schemeClr>
+            </a:gs>
+            <a:gs pos="100000">
+              <a:schemeClr val="phClr">
+                <a:shade val="63000"/>
+                <a:satMod val="120000"/>
+              </a:schemeClr>
+            </a:gs>
+          </a:gsLst>
+          <a:lin ang="5400000" scaled="0"/>
+        </a:gradFill>
+      </a:bgFillStyleLst>
+    </a:fmtScheme>
+  </a:themeElements>
+  <a:objectDefaults>
+    <a:lnDef>
+      <a:spPr/>
+      <a:bodyPr/>
+      <a:lstStyle/>
+      <a:style>
+        <a:lnRef idx="2">
+          <a:schemeClr val="accent1"/>
+        </a:lnRef>
+        <a:fillRef idx="0">
+          <a:schemeClr val="accent1"/>
+        </a:fillRef>
+        <a:effectRef idx="1">
+          <a:schemeClr val="accent1"/>
+        </a:effectRef>
+        <a:fontRef idx="minor">
+          <a:schemeClr val="tx1"/>
+        </a:fontRef>
+      </a:style>
+    </a:lnDef>
+  </a:objectDefaults>
+  <a:extraClrSchemeLst/>
+  <a:extLst>
+    <a:ext uri="{05A4C25C-085E-4340-85A3-A5531E510DB2}">
+      <thm15:themeFamily xmlns:thm15="http://schemas.microsoft.com/office/thememl/2012/main" name="Office Theme" id="{2E142A2C-CD16-42D6-873A-C26D2A0506FA}" vid="{1BDDFF52-6CD6-40A5-AB3C-68EB2F1E4D0A}"/>
+    </a:ext>
+  </a:extLst>
+</a:theme>
 </file>